--- a/Pregrado/Creatividad y pensamiento innovador/Clases/Sesion 06 - Innovación local–internacional · entidades de apoyo/Presentacion.pptx
+++ b/Pregrado/Creatividad y pensamiento innovador/Clases/Sesion 06 - Innovación local–internacional · entidades de apoyo/Presentacion.pptx
@@ -29,6 +29,8 @@
     <p:sldId id="277" r:id="rId28"/>
     <p:sldId id="278" r:id="rId29"/>
     <p:sldId id="279" r:id="rId30"/>
+    <p:sldId id="280" r:id="rId31"/>
+    <p:sldId id="281" r:id="rId32"/>
   </p:sldIdLst>
   <p:sldSz cx="12191695" cy="6858000" type="screen4x3"/>
   <p:notesSz cx="6858000" cy="9144000"/>
@@ -7484,7 +7486,7 @@
                 </a:solidFill>
                 <a:latin typeface="Calibri"/>
               </a:rPr>
-              <a:t>TALLER — Mapa de entidades + guion del pitch (23 minutos)</a:t>
+              <a:t>TALLER · Mapa de entidades + guion del pitch</a:t>
             </a:r>
           </a:p>
         </p:txBody>
@@ -7497,8 +7499,8 @@
         </p:nvSpPr>
         <p:spPr>
           <a:xfrm>
-            <a:off x="640080" y="1691639"/>
-            <a:ext cx="10911535" cy="4617720"/>
+            <a:off x="640080" y="1280160"/>
+            <a:ext cx="10911535" cy="411480"/>
           </a:xfrm>
           <a:prstGeom prst="rect">
             <a:avLst/>
@@ -7511,13 +7513,48 @@
           </a:bodyPr>
           <a:lstStyle/>
           <a:p>
+            <a:pPr algn="ctr"/>
+            <a:r>
+              <a:rPr sz="1500" b="0" i="0">
+                <a:solidFill>
+                  <a:srgbClr val="2B2B2B"/>
+                </a:solidFill>
+                <a:latin typeface="Calibri"/>
+              </a:rPr>
+              <a:t>Individual, con un ensayo en parejas y cronómetro · dos voluntarios hacen el pitch en vivo</a:t>
+            </a:r>
+          </a:p>
+        </p:txBody>
+      </p:sp>
+      <p:sp>
+        <p:nvSpPr>
+          <p:cNvPr id="5" name="TextBox 4"/>
+          <p:cNvSpPr txBox="1"/>
+          <p:nvPr/>
+        </p:nvSpPr>
+        <p:spPr>
+          <a:xfrm>
+            <a:off x="640080" y="2011679"/>
+            <a:ext cx="10911535" cy="4297680"/>
+          </a:xfrm>
+          <a:prstGeom prst="rect">
+            <a:avLst/>
+          </a:prstGeom>
+          <a:noFill/>
+        </p:spPr>
+        <p:txBody>
+          <a:bodyPr wrap="square" anchor="t" lIns="0" rIns="0" tIns="0" bIns="0">
+            <a:spAutoFit/>
+          </a:bodyPr>
+          <a:lstStyle/>
+          <a:p>
             <a:pPr>
               <a:spcAft>
                 <a:spcPts val="1000"/>
               </a:spcAft>
             </a:pPr>
             <a:r>
-              <a:rPr sz="1500" b="0" i="0">
+              <a:rPr sz="1600" b="0" i="0">
                 <a:solidFill>
                   <a:srgbClr val="2B2B2B"/>
                 </a:solidFill>
@@ -7526,128 +7563,22 @@
               <a:t>–   </a:t>
             </a:r>
             <a:r>
-              <a:rPr sz="1500" b="1" i="0">
-                <a:solidFill>
-                  <a:srgbClr val="2B2B2B"/>
-                </a:solidFill>
-                <a:latin typeface="Calibri"/>
-              </a:rPr>
-              <a:t>Paso 1 (8 min)</a:t>
-            </a:r>
-            <a:r>
-              <a:rPr sz="1500" b="0" i="0">
-                <a:solidFill>
-                  <a:srgbClr val="2B2B2B"/>
-                </a:solidFill>
-                <a:latin typeface="Calibri"/>
-              </a:rPr>
-              <a:t> · Completen su </a:t>
-            </a:r>
-            <a:r>
-              <a:rPr sz="1500" b="1" i="0">
-                <a:solidFill>
-                  <a:srgbClr val="2B2B2B"/>
-                </a:solidFill>
-                <a:latin typeface="Calibri"/>
-              </a:rPr>
-              <a:t>Mapa de entidades</a:t>
-            </a:r>
-            <a:r>
-              <a:rPr sz="1500" b="0" i="0">
-                <a:solidFill>
-                  <a:srgbClr val="2B2B2B"/>
-                </a:solidFill>
-                <a:latin typeface="Calibri"/>
-              </a:rPr>
-              <a:t> en Google Docs: </a:t>
-            </a:r>
-            <a:r>
-              <a:rPr sz="1500" b="1" i="0">
-                <a:solidFill>
-                  <a:srgbClr val="2B2B2B"/>
-                </a:solidFill>
-                <a:latin typeface="Calibri"/>
-              </a:rPr>
-              <a:t>mínimo 3 entidades reales</a:t>
-            </a:r>
-            <a:r>
-              <a:rPr sz="1500" b="0" i="0">
-                <a:solidFill>
-                  <a:srgbClr val="2B2B2B"/>
-                </a:solidFill>
-                <a:latin typeface="Calibri"/>
-              </a:rPr>
-              <a:t>, de </a:t>
-            </a:r>
-            <a:r>
-              <a:rPr sz="1500" b="1" i="0">
-                <a:solidFill>
-                  <a:srgbClr val="2B2B2B"/>
-                </a:solidFill>
-                <a:latin typeface="Calibri"/>
-              </a:rPr>
-              <a:t>cuadrantes distintos</a:t>
-            </a:r>
-            <a:r>
-              <a:rPr sz="1500" b="0" i="0">
-                <a:solidFill>
-                  <a:srgbClr val="2B2B2B"/>
-                </a:solidFill>
-                <a:latin typeface="Calibri"/>
-              </a:rPr>
-              <a:t>, con </a:t>
-            </a:r>
-            <a:r>
-              <a:rPr sz="1500" b="1" i="0">
-                <a:solidFill>
-                  <a:srgbClr val="2B2B2B"/>
-                </a:solidFill>
-                <a:latin typeface="Calibri"/>
-              </a:rPr>
-              <a:t>nombre correcto</a:t>
-            </a:r>
-            <a:r>
-              <a:rPr sz="1500" b="0" i="0">
-                <a:solidFill>
-                  <a:srgbClr val="2B2B2B"/>
-                </a:solidFill>
-                <a:latin typeface="Calibri"/>
-              </a:rPr>
-              <a:t> y un </a:t>
-            </a:r>
-            <a:r>
-              <a:rPr sz="1500" b="1" i="0">
-                <a:solidFill>
-                  <a:srgbClr val="2B2B2B"/>
-                </a:solidFill>
-                <a:latin typeface="Calibri"/>
-              </a:rPr>
-              <a:t>pedido concreto</a:t>
-            </a:r>
-            <a:r>
-              <a:rPr sz="1500" b="0" i="0">
-                <a:solidFill>
-                  <a:srgbClr val="2B2B2B"/>
-                </a:solidFill>
-                <a:latin typeface="Calibri"/>
-              </a:rPr>
-              <a:t> a cada una.</a:t>
-            </a:r>
-          </a:p>
-          <a:p>
-            <a:pPr lvl="1">
-              <a:spcAft>
-                <a:spcPts val="600"/>
-              </a:spcAft>
-            </a:pPr>
-            <a:r>
-              <a:rPr sz="1400" b="0" i="0">
-                <a:solidFill>
-                  <a:srgbClr val="2B2B2B"/>
-                </a:solidFill>
-                <a:latin typeface="Calibri"/>
-              </a:rPr>
-              <a:t>●   Verifiquen el nombre en el sitio de la entidad antes de escribirlo. Si no lo encuentran, esa entidad no entra.</a:t>
+              <a:rPr sz="1600" b="1" i="0">
+                <a:solidFill>
+                  <a:srgbClr val="2B2B2B"/>
+                </a:solidFill>
+                <a:latin typeface="Calibri"/>
+              </a:rPr>
+              <a:t>Al final tiene:</a:t>
+            </a:r>
+            <a:r>
+              <a:rPr sz="1600" b="0" i="0">
+                <a:solidFill>
+                  <a:srgbClr val="2B2B2B"/>
+                </a:solidFill>
+                <a:latin typeface="Calibri"/>
+              </a:rPr>
+              <a:t> el mapa de entidades, su frase de impacto y el guion del pitch de 60 segundos.</a:t>
             </a:r>
           </a:p>
           <a:p>
@@ -7657,7 +7588,7 @@
               </a:spcAft>
             </a:pPr>
             <a:r>
-              <a:rPr sz="1500" b="0" i="0">
+              <a:rPr sz="1600" b="0" i="0">
                 <a:solidFill>
                   <a:srgbClr val="2B2B2B"/>
                 </a:solidFill>
@@ -7666,40 +7597,112 @@
               <a:t>–   </a:t>
             </a:r>
             <a:r>
-              <a:rPr sz="1500" b="1" i="0">
-                <a:solidFill>
-                  <a:srgbClr val="2B2B2B"/>
-                </a:solidFill>
-                <a:latin typeface="Calibri"/>
-              </a:rPr>
-              <a:t>Paso 2 (3 min)</a:t>
-            </a:r>
-            <a:r>
-              <a:rPr sz="1500" b="0" i="0">
-                <a:solidFill>
-                  <a:srgbClr val="2B2B2B"/>
-                </a:solidFill>
-                <a:latin typeface="Calibri"/>
-              </a:rPr>
-              <a:t> · Escriban su </a:t>
-            </a:r>
-            <a:r>
-              <a:rPr sz="1500" b="1" i="0">
-                <a:solidFill>
-                  <a:srgbClr val="2B2B2B"/>
-                </a:solidFill>
-                <a:latin typeface="Calibri"/>
-              </a:rPr>
-              <a:t>frase de impacto</a:t>
-            </a:r>
-            <a:r>
-              <a:rPr sz="1500" b="0" i="0">
-                <a:solidFill>
-                  <a:srgbClr val="2B2B2B"/>
-                </a:solidFill>
-                <a:latin typeface="Calibri"/>
-              </a:rPr>
-              <a:t>: a quién + qué cambia + en cuánto. Una sola frase.</a:t>
+              <a:rPr sz="1600" b="1" i="0">
+                <a:solidFill>
+                  <a:srgbClr val="2B2B2B"/>
+                </a:solidFill>
+                <a:latin typeface="Calibri"/>
+              </a:rPr>
+              <a:t>Paso 1</a:t>
+            </a:r>
+            <a:r>
+              <a:rPr sz="1600" b="0" i="0">
+                <a:solidFill>
+                  <a:srgbClr val="2B2B2B"/>
+                </a:solidFill>
+                <a:latin typeface="Calibri"/>
+              </a:rPr>
+              <a:t> · Complete el </a:t>
+            </a:r>
+            <a:r>
+              <a:rPr sz="1600" b="1" i="0">
+                <a:solidFill>
+                  <a:srgbClr val="2B2B2B"/>
+                </a:solidFill>
+                <a:latin typeface="Calibri"/>
+              </a:rPr>
+              <a:t>Mapa de entidades</a:t>
+            </a:r>
+            <a:r>
+              <a:rPr sz="1600" b="0" i="0">
+                <a:solidFill>
+                  <a:srgbClr val="2B2B2B"/>
+                </a:solidFill>
+                <a:latin typeface="Calibri"/>
+              </a:rPr>
+              <a:t>: </a:t>
+            </a:r>
+            <a:r>
+              <a:rPr sz="1600" b="1" i="0">
+                <a:solidFill>
+                  <a:srgbClr val="2B2B2B"/>
+                </a:solidFill>
+                <a:latin typeface="Calibri"/>
+              </a:rPr>
+              <a:t>mínimo 3 entidades reales</a:t>
+            </a:r>
+            <a:r>
+              <a:rPr sz="1600" b="0" i="0">
+                <a:solidFill>
+                  <a:srgbClr val="2B2B2B"/>
+                </a:solidFill>
+                <a:latin typeface="Calibri"/>
+              </a:rPr>
+              <a:t> de </a:t>
+            </a:r>
+            <a:r>
+              <a:rPr sz="1600" b="1" i="0">
+                <a:solidFill>
+                  <a:srgbClr val="2B2B2B"/>
+                </a:solidFill>
+                <a:latin typeface="Calibri"/>
+              </a:rPr>
+              <a:t>cuadrantes distintos</a:t>
+            </a:r>
+            <a:r>
+              <a:rPr sz="1600" b="0" i="0">
+                <a:solidFill>
+                  <a:srgbClr val="2B2B2B"/>
+                </a:solidFill>
+                <a:latin typeface="Calibri"/>
+              </a:rPr>
+              <a:t>, con el </a:t>
+            </a:r>
+            <a:r>
+              <a:rPr sz="1600" b="1" i="0">
+                <a:solidFill>
+                  <a:srgbClr val="2B2B2B"/>
+                </a:solidFill>
+                <a:latin typeface="Calibri"/>
+              </a:rPr>
+              <a:t>nombre correcto</a:t>
+            </a:r>
+            <a:r>
+              <a:rPr sz="1600" b="0" i="0">
+                <a:solidFill>
+                  <a:srgbClr val="2B2B2B"/>
+                </a:solidFill>
+                <a:latin typeface="Calibri"/>
+              </a:rPr>
+              <a:t> y un </a:t>
+            </a:r>
+            <a:r>
+              <a:rPr sz="1600" b="1" i="0">
+                <a:solidFill>
+                  <a:srgbClr val="2B2B2B"/>
+                </a:solidFill>
+                <a:latin typeface="Calibri"/>
+              </a:rPr>
+              <a:t>pedido concreto</a:t>
+            </a:r>
+            <a:r>
+              <a:rPr sz="1600" b="0" i="0">
+                <a:solidFill>
+                  <a:srgbClr val="2B2B2B"/>
+                </a:solidFill>
+                <a:latin typeface="Calibri"/>
+              </a:rPr>
+              <a:t> a cada una. Verifique el nombre en el sitio de la entidad; si no lo encuentra, esa entidad no entra.</a:t>
             </a:r>
           </a:p>
           <a:p>
@@ -7709,7 +7712,7 @@
               </a:spcAft>
             </a:pPr>
             <a:r>
-              <a:rPr sz="1500" b="0" i="0">
+              <a:rPr sz="1600" b="0" i="0">
                 <a:solidFill>
                   <a:srgbClr val="2B2B2B"/>
                 </a:solidFill>
@@ -7718,58 +7721,40 @@
               <a:t>–   </a:t>
             </a:r>
             <a:r>
-              <a:rPr sz="1500" b="1" i="0">
-                <a:solidFill>
-                  <a:srgbClr val="2B2B2B"/>
-                </a:solidFill>
-                <a:latin typeface="Calibri"/>
-              </a:rPr>
-              <a:t>Paso 3 (6 min)</a:t>
-            </a:r>
-            <a:r>
-              <a:rPr sz="1500" b="0" i="0">
-                <a:solidFill>
-                  <a:srgbClr val="2B2B2B"/>
-                </a:solidFill>
-                <a:latin typeface="Calibri"/>
-              </a:rPr>
-              <a:t> · Escriban el </a:t>
-            </a:r>
-            <a:r>
-              <a:rPr sz="1500" b="1" i="0">
-                <a:solidFill>
-                  <a:srgbClr val="2B2B2B"/>
-                </a:solidFill>
-                <a:latin typeface="Calibri"/>
-              </a:rPr>
-              <a:t>guion del pitch de 60 s</a:t>
-            </a:r>
-            <a:r>
-              <a:rPr sz="1500" b="0" i="0">
-                <a:solidFill>
-                  <a:srgbClr val="2B2B2B"/>
-                </a:solidFill>
-                <a:latin typeface="Calibri"/>
-              </a:rPr>
-              <a:t> siguiendo los </a:t>
-            </a:r>
-            <a:r>
-              <a:rPr sz="1500" b="1" i="0">
-                <a:solidFill>
-                  <a:srgbClr val="2B2B2B"/>
-                </a:solidFill>
-                <a:latin typeface="Calibri"/>
-              </a:rPr>
-              <a:t>cinco tramos</a:t>
-            </a:r>
-            <a:r>
-              <a:rPr sz="1500" b="0" i="0">
-                <a:solidFill>
-                  <a:srgbClr val="2B2B2B"/>
-                </a:solidFill>
-                <a:latin typeface="Calibri"/>
-              </a:rPr>
-              <a:t>. Pueden bocetarlo en Excalidraw.</a:t>
+              <a:rPr sz="1600" b="1" i="0">
+                <a:solidFill>
+                  <a:srgbClr val="2B2B2B"/>
+                </a:solidFill>
+                <a:latin typeface="Calibri"/>
+              </a:rPr>
+              <a:t>Paso 2</a:t>
+            </a:r>
+            <a:r>
+              <a:rPr sz="1600" b="0" i="0">
+                <a:solidFill>
+                  <a:srgbClr val="2B2B2B"/>
+                </a:solidFill>
+                <a:latin typeface="Calibri"/>
+              </a:rPr>
+              <a:t> · Escriba su </a:t>
+            </a:r>
+            <a:r>
+              <a:rPr sz="1600" b="1" i="0">
+                <a:solidFill>
+                  <a:srgbClr val="2B2B2B"/>
+                </a:solidFill>
+                <a:latin typeface="Calibri"/>
+              </a:rPr>
+              <a:t>frase de impacto</a:t>
+            </a:r>
+            <a:r>
+              <a:rPr sz="1600" b="0" i="0">
+                <a:solidFill>
+                  <a:srgbClr val="2B2B2B"/>
+                </a:solidFill>
+                <a:latin typeface="Calibri"/>
+              </a:rPr>
+              <a:t>: a quién + qué cambia + en cuánto. Una sola frase.</a:t>
             </a:r>
           </a:p>
           <a:p>
@@ -7779,7 +7764,7 @@
               </a:spcAft>
             </a:pPr>
             <a:r>
-              <a:rPr sz="1500" b="0" i="0">
+              <a:rPr sz="1600" b="0" i="0">
                 <a:solidFill>
                   <a:srgbClr val="2B2B2B"/>
                 </a:solidFill>
@@ -7788,40 +7773,58 @@
               <a:t>–   </a:t>
             </a:r>
             <a:r>
-              <a:rPr sz="1500" b="1" i="0">
-                <a:solidFill>
-                  <a:srgbClr val="2B2B2B"/>
-                </a:solidFill>
-                <a:latin typeface="Calibri"/>
-              </a:rPr>
-              <a:t>Paso 4 (4 min)</a:t>
-            </a:r>
-            <a:r>
-              <a:rPr sz="1500" b="0" i="0">
-                <a:solidFill>
-                  <a:srgbClr val="2B2B2B"/>
-                </a:solidFill>
-                <a:latin typeface="Calibri"/>
-              </a:rPr>
-              <a:t> · </a:t>
-            </a:r>
-            <a:r>
-              <a:rPr sz="1500" b="1" i="0">
-                <a:solidFill>
-                  <a:srgbClr val="2B2B2B"/>
-                </a:solidFill>
-                <a:latin typeface="Calibri"/>
-              </a:rPr>
-              <a:t>Ensayen en parejas</a:t>
-            </a:r>
-            <a:r>
-              <a:rPr sz="1500" b="0" i="0">
-                <a:solidFill>
-                  <a:srgbClr val="2B2B2B"/>
-                </a:solidFill>
-                <a:latin typeface="Calibri"/>
-              </a:rPr>
-              <a:t> con cronómetro. El que escucha repite qué entendió; el que habla ajusta.</a:t>
+              <a:rPr sz="1600" b="1" i="0">
+                <a:solidFill>
+                  <a:srgbClr val="2B2B2B"/>
+                </a:solidFill>
+                <a:latin typeface="Calibri"/>
+              </a:rPr>
+              <a:t>Paso 3</a:t>
+            </a:r>
+            <a:r>
+              <a:rPr sz="1600" b="0" i="0">
+                <a:solidFill>
+                  <a:srgbClr val="2B2B2B"/>
+                </a:solidFill>
+                <a:latin typeface="Calibri"/>
+              </a:rPr>
+              <a:t> · Escriba el </a:t>
+            </a:r>
+            <a:r>
+              <a:rPr sz="1600" b="1" i="0">
+                <a:solidFill>
+                  <a:srgbClr val="2B2B2B"/>
+                </a:solidFill>
+                <a:latin typeface="Calibri"/>
+              </a:rPr>
+              <a:t>guion del pitch de 60 s</a:t>
+            </a:r>
+            <a:r>
+              <a:rPr sz="1600" b="0" i="0">
+                <a:solidFill>
+                  <a:srgbClr val="2B2B2B"/>
+                </a:solidFill>
+                <a:latin typeface="Calibri"/>
+              </a:rPr>
+              <a:t> con los </a:t>
+            </a:r>
+            <a:r>
+              <a:rPr sz="1600" b="1" i="0">
+                <a:solidFill>
+                  <a:srgbClr val="2B2B2B"/>
+                </a:solidFill>
+                <a:latin typeface="Calibri"/>
+              </a:rPr>
+              <a:t>cinco tramos</a:t>
+            </a:r>
+            <a:r>
+              <a:rPr sz="1600" b="0" i="0">
+                <a:solidFill>
+                  <a:srgbClr val="2B2B2B"/>
+                </a:solidFill>
+                <a:latin typeface="Calibri"/>
+              </a:rPr>
+              <a:t>. Puede bocetarlo en Excalidraw.</a:t>
             </a:r>
           </a:p>
           <a:p>
@@ -7831,7 +7834,7 @@
               </a:spcAft>
             </a:pPr>
             <a:r>
-              <a:rPr sz="1500" b="0" i="0">
+              <a:rPr sz="1600" b="0" i="0">
                 <a:solidFill>
                   <a:srgbClr val="2B2B2B"/>
                 </a:solidFill>
@@ -7840,16 +7843,16 @@
               <a:t>–   </a:t>
             </a:r>
             <a:r>
-              <a:rPr sz="1500" b="1" i="0">
-                <a:solidFill>
-                  <a:srgbClr val="2B2B2B"/>
-                </a:solidFill>
-                <a:latin typeface="Calibri"/>
-              </a:rPr>
-              <a:t>Paso 5 (2 min)</a:t>
-            </a:r>
-            <a:r>
-              <a:rPr sz="1500" b="0" i="0">
+              <a:rPr sz="1600" b="1" i="0">
+                <a:solidFill>
+                  <a:srgbClr val="2B2B2B"/>
+                </a:solidFill>
+                <a:latin typeface="Calibri"/>
+              </a:rPr>
+              <a:t>Paso 4</a:t>
+            </a:r>
+            <a:r>
+              <a:rPr sz="1600" b="0" i="0">
                 <a:solidFill>
                   <a:srgbClr val="2B2B2B"/>
                 </a:solidFill>
@@ -7858,22 +7861,22 @@
               <a:t> · </a:t>
             </a:r>
             <a:r>
-              <a:rPr sz="1500" b="1" i="0">
-                <a:solidFill>
-                  <a:srgbClr val="2B2B2B"/>
-                </a:solidFill>
-                <a:latin typeface="Calibri"/>
-              </a:rPr>
-              <a:t>Dos voluntarios</a:t>
-            </a:r>
-            <a:r>
-              <a:rPr sz="1500" b="0" i="0">
-                <a:solidFill>
-                  <a:srgbClr val="2B2B2B"/>
-                </a:solidFill>
-                <a:latin typeface="Calibri"/>
-              </a:rPr>
-              <a:t> hacen su pitch en vivo y se les toma el tiempo. El resto se sustenta la próxima sesión.</a:t>
+              <a:rPr sz="1600" b="1" i="0">
+                <a:solidFill>
+                  <a:srgbClr val="2B2B2B"/>
+                </a:solidFill>
+                <a:latin typeface="Calibri"/>
+              </a:rPr>
+              <a:t>Ensaye en parejas</a:t>
+            </a:r>
+            <a:r>
+              <a:rPr sz="1600" b="0" i="0">
+                <a:solidFill>
+                  <a:srgbClr val="2B2B2B"/>
+                </a:solidFill>
+                <a:latin typeface="Calibri"/>
+              </a:rPr>
+              <a:t> con cronómetro: quien escucha repite qué entendió y quien habla ajusta.</a:t>
             </a:r>
           </a:p>
           <a:p>
@@ -7883,41 +7886,7 @@
               </a:spcAft>
             </a:pPr>
             <a:r>
-              <a:rPr sz="1500" b="0" i="0">
-                <a:solidFill>
-                  <a:srgbClr val="2B2B2B"/>
-                </a:solidFill>
-                <a:latin typeface="Calibri"/>
-              </a:rPr>
-              <a:t>–   Si quieren una diapositiva de apoyo: </a:t>
-            </a:r>
-            <a:r>
-              <a:rPr sz="1500" b="1" i="0">
-                <a:solidFill>
-                  <a:srgbClr val="2B2B2B"/>
-                </a:solidFill>
-                <a:latin typeface="Calibri"/>
-              </a:rPr>
-              <a:t>Canva free</a:t>
-            </a:r>
-            <a:r>
-              <a:rPr sz="1500" b="0" i="0">
-                <a:solidFill>
-                  <a:srgbClr val="2B2B2B"/>
-                </a:solidFill>
-                <a:latin typeface="Calibri"/>
-              </a:rPr>
-              <a:t>, opcional, una sola.</a:t>
-            </a:r>
-          </a:p>
-          <a:p>
-            <a:pPr>
-              <a:spcAft>
-                <a:spcPts val="1000"/>
-              </a:spcAft>
-            </a:pPr>
-            <a:r>
-              <a:rPr sz="1500" b="0" i="0">
+              <a:rPr sz="1600" b="0" i="0">
                 <a:solidFill>
                   <a:srgbClr val="2B2B2B"/>
                 </a:solidFill>
@@ -7926,99 +7895,47 @@
               <a:t>–   </a:t>
             </a:r>
             <a:r>
-              <a:rPr sz="1500" b="1" i="0">
-                <a:solidFill>
-                  <a:srgbClr val="2B2B2B"/>
-                </a:solidFill>
-                <a:latin typeface="Calibri"/>
-              </a:rPr>
-              <a:t>Criterio de éxito verificable:</a:t>
-            </a:r>
-            <a:r>
-              <a:rPr sz="1500" b="0" i="0">
-                <a:solidFill>
-                  <a:srgbClr val="2B2B2B"/>
-                </a:solidFill>
-                <a:latin typeface="Calibri"/>
-              </a:rPr>
-              <a:t> </a:t>
-            </a:r>
-            <a:r>
-              <a:rPr sz="1500" b="1" i="0">
-                <a:solidFill>
-                  <a:srgbClr val="2B2B2B"/>
-                </a:solidFill>
-                <a:latin typeface="Calibri"/>
-              </a:rPr>
-              <a:t>3 entidades con pedido concreto</a:t>
-            </a:r>
-            <a:r>
-              <a:rPr sz="1500" b="0" i="0">
-                <a:solidFill>
-                  <a:srgbClr val="2B2B2B"/>
-                </a:solidFill>
-                <a:latin typeface="Calibri"/>
-              </a:rPr>
-              <a:t> + un guion en el que, en </a:t>
-            </a:r>
-            <a:r>
-              <a:rPr sz="1500" b="1" i="0">
-                <a:solidFill>
-                  <a:srgbClr val="2B2B2B"/>
-                </a:solidFill>
-                <a:latin typeface="Calibri"/>
-              </a:rPr>
-              <a:t>60 segundos</a:t>
-            </a:r>
-            <a:r>
-              <a:rPr sz="1500" b="0" i="0">
-                <a:solidFill>
-                  <a:srgbClr val="2B2B2B"/>
-                </a:solidFill>
-                <a:latin typeface="Calibri"/>
-              </a:rPr>
-              <a:t>, se entienden </a:t>
-            </a:r>
-            <a:r>
-              <a:rPr sz="1500" b="1" i="0">
-                <a:solidFill>
-                  <a:srgbClr val="2B2B2B"/>
-                </a:solidFill>
-                <a:latin typeface="Calibri"/>
-              </a:rPr>
-              <a:t>dolor, valor y pedido</a:t>
-            </a:r>
-            <a:r>
-              <a:rPr sz="1500" b="0" i="0">
-                <a:solidFill>
-                  <a:srgbClr val="2B2B2B"/>
-                </a:solidFill>
-                <a:latin typeface="Calibri"/>
-              </a:rPr>
-              <a:t>.</a:t>
-            </a:r>
-          </a:p>
-          <a:p>
-            <a:pPr lvl="1">
-              <a:spcAft>
-                <a:spcPts val="600"/>
-              </a:spcAft>
-            </a:pPr>
-            <a:r>
-              <a:rPr sz="1400" b="0" i="0">
-                <a:solidFill>
-                  <a:srgbClr val="2B2B2B"/>
-                </a:solidFill>
-                <a:latin typeface="Calibri"/>
-              </a:rPr>
-              <a:t>●   Verificación en pareja: si su compañero no puede repetir el pedido después de escucharlo, el tramo 5 está mal escrito.</a:t>
-            </a:r>
-          </a:p>
-        </p:txBody>
-      </p:sp>
-      <p:sp>
-        <p:nvSpPr>
-          <p:cNvPr id="5" name="TextBox 4"/>
+              <a:rPr sz="1600" b="1" i="0">
+                <a:solidFill>
+                  <a:srgbClr val="2B2B2B"/>
+                </a:solidFill>
+                <a:latin typeface="Calibri"/>
+              </a:rPr>
+              <a:t>En clase, sin falta:</a:t>
+            </a:r>
+            <a:r>
+              <a:rPr sz="1600" b="0" i="0">
+                <a:solidFill>
+                  <a:srgbClr val="2B2B2B"/>
+                </a:solidFill>
+                <a:latin typeface="Calibri"/>
+              </a:rPr>
+              <a:t> los </a:t>
+            </a:r>
+            <a:r>
+              <a:rPr sz="1600" b="1" i="0">
+                <a:solidFill>
+                  <a:srgbClr val="2B2B2B"/>
+                </a:solidFill>
+                <a:latin typeface="Calibri"/>
+              </a:rPr>
+              <a:t>pasos 1 a 3</a:t>
+            </a:r>
+            <a:r>
+              <a:rPr sz="1600" b="0" i="0">
+                <a:solidFill>
+                  <a:srgbClr val="2B2B2B"/>
+                </a:solidFill>
+                <a:latin typeface="Calibri"/>
+              </a:rPr>
+              <a:t>. Del 4 en adelante puede quedar en trabajo autónomo, pero antes de la próxima sesión.</a:t>
+            </a:r>
+          </a:p>
+        </p:txBody>
+      </p:sp>
+      <p:sp>
+        <p:nvSpPr>
+          <p:cNvPr id="6" name="TextBox 5"/>
           <p:cNvSpPr txBox="1"/>
           <p:nvPr/>
         </p:nvSpPr>
@@ -8053,7 +7970,7 @@
       </p:sp>
       <p:sp>
         <p:nvSpPr>
-          <p:cNvPr id="6" name="TextBox 5"/>
+          <p:cNvPr id="7" name="TextBox 6"/>
           <p:cNvSpPr txBox="1"/>
           <p:nvPr/>
         </p:nvSpPr>
@@ -8080,7 +7997,25 @@
                 </a:solidFill>
                 <a:latin typeface="Calibri"/>
               </a:rPr>
-              <a:t>El cronómetro no es para presionar: es para que descubran cuánto sobra. Casi siempre sobra el tramo 3.</a:t>
+              <a:t>Si quiere una diapositiva de apoyo: </a:t>
+            </a:r>
+            <a:r>
+              <a:rPr sz="1200" b="1" i="1">
+                <a:solidFill>
+                  <a:srgbClr val="2B2B2B"/>
+                </a:solidFill>
+                <a:latin typeface="Calibri"/>
+              </a:rPr>
+              <a:t>Canva free</a:t>
+            </a:r>
+            <a:r>
+              <a:rPr sz="1200" b="0" i="1">
+                <a:solidFill>
+                  <a:srgbClr val="2B2B2B"/>
+                </a:solidFill>
+                <a:latin typeface="Calibri"/>
+              </a:rPr>
+              <a:t>, opcional, una sola. El cronómetro no es para presionar, es para descubrir cuánto sobra.</a:t>
             </a:r>
           </a:p>
         </p:txBody>
@@ -8805,7 +8740,7 @@
                 </a:solidFill>
                 <a:latin typeface="Calibri"/>
               </a:rPr>
-              <a:t>Antes de entregar: revise usted mismo</a:t>
+              <a:t>TALLER · cómo se revisa y dónde se entrega</a:t>
             </a:r>
           </a:p>
         </p:txBody>
@@ -8818,8 +8753,8 @@
         </p:nvSpPr>
         <p:spPr>
           <a:xfrm>
-            <a:off x="640080" y="1691639"/>
-            <a:ext cx="10911535" cy="4617720"/>
+            <a:off x="640080" y="1280160"/>
+            <a:ext cx="10911535" cy="411480"/>
           </a:xfrm>
           <a:prstGeom prst="rect">
             <a:avLst/>
@@ -8832,6 +8767,41 @@
           </a:bodyPr>
           <a:lstStyle/>
           <a:p>
+            <a:pPr algn="ctr"/>
+            <a:r>
+              <a:rPr sz="1500" b="0" i="0">
+                <a:solidFill>
+                  <a:srgbClr val="2B2B2B"/>
+                </a:solidFill>
+                <a:latin typeface="Calibri"/>
+              </a:rPr>
+              <a:t>Mapa de entidades + guion del pitch</a:t>
+            </a:r>
+          </a:p>
+        </p:txBody>
+      </p:sp>
+      <p:sp>
+        <p:nvSpPr>
+          <p:cNvPr id="5" name="TextBox 4"/>
+          <p:cNvSpPr txBox="1"/>
+          <p:nvPr/>
+        </p:nvSpPr>
+        <p:spPr>
+          <a:xfrm>
+            <a:off x="640080" y="2011679"/>
+            <a:ext cx="10911535" cy="4297680"/>
+          </a:xfrm>
+          <a:prstGeom prst="rect">
+            <a:avLst/>
+          </a:prstGeom>
+          <a:noFill/>
+        </p:spPr>
+        <p:txBody>
+          <a:bodyPr wrap="square" anchor="t" lIns="0" rIns="0" tIns="0" bIns="0">
+            <a:spAutoFit/>
+          </a:bodyPr>
+          <a:lstStyle/>
+          <a:p>
             <a:pPr>
               <a:spcAft>
                 <a:spcPts val="1000"/>
@@ -8844,7 +8814,7 @@
                 </a:solidFill>
                 <a:latin typeface="Calibri"/>
               </a:rPr>
-              <a:t>–   ☐ Mis </a:t>
+              <a:t>–   </a:t>
             </a:r>
             <a:r>
               <a:rPr sz="1600" b="1" i="0">
@@ -8853,7 +8823,7 @@
                 </a:solidFill>
                 <a:latin typeface="Calibri"/>
               </a:rPr>
-              <a:t>3 entidades existen</a:t>
+              <a:t>Quedó bien si</a:t>
             </a:r>
             <a:r>
               <a:rPr sz="1600" b="0" i="0">
@@ -8862,25 +8832,145 @@
                 </a:solidFill>
                 <a:latin typeface="Calibri"/>
               </a:rPr>
-              <a:t> y escribí su </a:t>
-            </a:r>
-            <a:r>
-              <a:rPr sz="1600" b="1" i="0">
-                <a:solidFill>
-                  <a:srgbClr val="2B2B2B"/>
-                </a:solidFill>
-                <a:latin typeface="Calibri"/>
-              </a:rPr>
-              <a:t>nombre correcto</a:t>
-            </a:r>
-            <a:r>
-              <a:rPr sz="1600" b="0" i="0">
-                <a:solidFill>
-                  <a:srgbClr val="2B2B2B"/>
-                </a:solidFill>
-                <a:latin typeface="Calibri"/>
-              </a:rPr>
-              <a:t> (lo verifiqué en su sitio), y no son las tres del mismo cuadrante.</a:t>
+              <a:t> —compruébelo usted antes de cerrar el documento—:</a:t>
+            </a:r>
+          </a:p>
+          <a:p>
+            <a:pPr lvl="1">
+              <a:spcAft>
+                <a:spcPts val="600"/>
+              </a:spcAft>
+            </a:pPr>
+            <a:r>
+              <a:rPr sz="1500" b="0" i="0">
+                <a:solidFill>
+                  <a:srgbClr val="2B2B2B"/>
+                </a:solidFill>
+                <a:latin typeface="Calibri"/>
+              </a:rPr>
+              <a:t>●   Las </a:t>
+            </a:r>
+            <a:r>
+              <a:rPr sz="1500" b="1" i="0">
+                <a:solidFill>
+                  <a:srgbClr val="2B2B2B"/>
+                </a:solidFill>
+                <a:latin typeface="Calibri"/>
+              </a:rPr>
+              <a:t>3 entidades</a:t>
+            </a:r>
+            <a:r>
+              <a:rPr sz="1500" b="0" i="0">
+                <a:solidFill>
+                  <a:srgbClr val="2B2B2B"/>
+                </a:solidFill>
+                <a:latin typeface="Calibri"/>
+              </a:rPr>
+              <a:t> tienen nombre verificado y </a:t>
+            </a:r>
+            <a:r>
+              <a:rPr sz="1500" b="1" i="0">
+                <a:solidFill>
+                  <a:srgbClr val="2B2B2B"/>
+                </a:solidFill>
+                <a:latin typeface="Calibri"/>
+              </a:rPr>
+              <a:t>pedido concreto</a:t>
+            </a:r>
+            <a:r>
+              <a:rPr sz="1500" b="0" i="0">
+                <a:solidFill>
+                  <a:srgbClr val="2B2B2B"/>
+                </a:solidFill>
+                <a:latin typeface="Calibri"/>
+              </a:rPr>
+              <a:t>.</a:t>
+            </a:r>
+          </a:p>
+          <a:p>
+            <a:pPr lvl="1">
+              <a:spcAft>
+                <a:spcPts val="600"/>
+              </a:spcAft>
+            </a:pPr>
+            <a:r>
+              <a:rPr sz="1500" b="0" i="0">
+                <a:solidFill>
+                  <a:srgbClr val="2B2B2B"/>
+                </a:solidFill>
+                <a:latin typeface="Calibri"/>
+              </a:rPr>
+              <a:t>●   En </a:t>
+            </a:r>
+            <a:r>
+              <a:rPr sz="1500" b="1" i="0">
+                <a:solidFill>
+                  <a:srgbClr val="2B2B2B"/>
+                </a:solidFill>
+                <a:latin typeface="Calibri"/>
+              </a:rPr>
+              <a:t>60 segundos</a:t>
+            </a:r>
+            <a:r>
+              <a:rPr sz="1500" b="0" i="0">
+                <a:solidFill>
+                  <a:srgbClr val="2B2B2B"/>
+                </a:solidFill>
+                <a:latin typeface="Calibri"/>
+              </a:rPr>
+              <a:t> se entienden </a:t>
+            </a:r>
+            <a:r>
+              <a:rPr sz="1500" b="1" i="0">
+                <a:solidFill>
+                  <a:srgbClr val="2B2B2B"/>
+                </a:solidFill>
+                <a:latin typeface="Calibri"/>
+              </a:rPr>
+              <a:t>dolor, valor y pedido</a:t>
+            </a:r>
+            <a:r>
+              <a:rPr sz="1500" b="0" i="0">
+                <a:solidFill>
+                  <a:srgbClr val="2B2B2B"/>
+                </a:solidFill>
+                <a:latin typeface="Calibri"/>
+              </a:rPr>
+              <a:t>.</a:t>
+            </a:r>
+          </a:p>
+          <a:p>
+            <a:pPr lvl="1">
+              <a:spcAft>
+                <a:spcPts val="600"/>
+              </a:spcAft>
+            </a:pPr>
+            <a:r>
+              <a:rPr sz="1500" b="0" i="0">
+                <a:solidFill>
+                  <a:srgbClr val="2B2B2B"/>
+                </a:solidFill>
+                <a:latin typeface="Calibri"/>
+              </a:rPr>
+              <a:t>●   Su compañero pudo </a:t>
+            </a:r>
+            <a:r>
+              <a:rPr sz="1500" b="1" i="0">
+                <a:solidFill>
+                  <a:srgbClr val="2B2B2B"/>
+                </a:solidFill>
+                <a:latin typeface="Calibri"/>
+              </a:rPr>
+              <a:t>repetir el pedido</a:t>
+            </a:r>
+            <a:r>
+              <a:rPr sz="1500" b="0" i="0">
+                <a:solidFill>
+                  <a:srgbClr val="2B2B2B"/>
+                </a:solidFill>
+                <a:latin typeface="Calibri"/>
+              </a:rPr>
+              <a:t> después de escucharlo; si no, el tramo 5 está mal escrito.</a:t>
             </a:r>
           </a:p>
           <a:p>
@@ -8896,7 +8986,7 @@
                 </a:solidFill>
                 <a:latin typeface="Calibri"/>
               </a:rPr>
-              <a:t>–   ☐ Cada entidad tiene </a:t>
+              <a:t>–   </a:t>
             </a:r>
             <a:r>
               <a:rPr sz="1600" b="1" i="0">
@@ -8905,7 +8995,7 @@
                 </a:solidFill>
                 <a:latin typeface="Calibri"/>
               </a:rPr>
-              <a:t>un solo tipo de encaje</a:t>
+              <a:t>Plan B:</a:t>
             </a:r>
             <a:r>
               <a:rPr sz="1600" b="0" i="0">
@@ -8914,7 +9004,7 @@
                 </a:solidFill>
                 <a:latin typeface="Calibri"/>
               </a:rPr>
-              <a:t>: mentoría, capital, networking, infraestructura o validación.</a:t>
+              <a:t> Si el guion no cabe en 60 segundos, recorte el tramo 3: casi siempre es el que sobra.</a:t>
             </a:r>
           </a:p>
           <a:p>
@@ -8930,7 +9020,7 @@
                 </a:solidFill>
                 <a:latin typeface="Calibri"/>
               </a:rPr>
-              <a:t>–   ☐ Cada pedido es </a:t>
+              <a:t>–   </a:t>
             </a:r>
             <a:r>
               <a:rPr sz="1600" b="1" i="0">
@@ -8939,7 +9029,7 @@
                 </a:solidFill>
                 <a:latin typeface="Calibri"/>
               </a:rPr>
-              <a:t>concreto y acotado</a:t>
+              <a:t>Entrega:</a:t>
             </a:r>
             <a:r>
               <a:rPr sz="1600" b="0" i="0">
@@ -8948,7 +9038,7 @@
                 </a:solidFill>
                 <a:latin typeface="Calibri"/>
               </a:rPr>
-              <a:t>: dice </a:t>
+              <a:t> suba `S06_EcosistemaPitch_Apellido` (Google Doc o PDF) como </a:t>
             </a:r>
             <a:r>
               <a:rPr sz="1600" b="1" i="0">
@@ -8957,7 +9047,7 @@
                 </a:solidFill>
                 <a:latin typeface="Calibri"/>
               </a:rPr>
-              <a:t>cuánto</a:t>
+              <a:t>ACA Final</a:t>
             </a:r>
             <a:r>
               <a:rPr sz="1600" b="0" i="0">
@@ -8966,7 +9056,7 @@
                 </a:solidFill>
                 <a:latin typeface="Calibri"/>
               </a:rPr>
-              <a:t>, </a:t>
+              <a:t> —tarea, 32,8%— en </a:t>
             </a:r>
             <a:r>
               <a:rPr sz="1600" b="1" i="0">
@@ -8975,25 +9065,7 @@
                 </a:solidFill>
                 <a:latin typeface="Calibri"/>
               </a:rPr>
-              <a:t>de qué</a:t>
-            </a:r>
-            <a:r>
-              <a:rPr sz="1600" b="0" i="0">
-                <a:solidFill>
-                  <a:srgbClr val="2B2B2B"/>
-                </a:solidFill>
-                <a:latin typeface="Calibri"/>
-              </a:rPr>
-              <a:t> y </a:t>
-            </a:r>
-            <a:r>
-              <a:rPr sz="1600" b="1" i="0">
-                <a:solidFill>
-                  <a:srgbClr val="2B2B2B"/>
-                </a:solidFill>
-                <a:latin typeface="Calibri"/>
-              </a:rPr>
-              <a:t>por cuánto tiempo</a:t>
+              <a:t>CDigital</a:t>
             </a:r>
             <a:r>
               <a:rPr sz="1600" b="0" i="0">
@@ -9018,7 +9090,7 @@
                 </a:solidFill>
                 <a:latin typeface="Calibri"/>
               </a:rPr>
-              <a:t>–   ☐ Escribí mi </a:t>
+              <a:t>–   </a:t>
             </a:r>
             <a:r>
               <a:rPr sz="1600" b="1" i="0">
@@ -9027,7 +9099,7 @@
                 </a:solidFill>
                 <a:latin typeface="Calibri"/>
               </a:rPr>
-              <a:t>frase de impacto</a:t>
+              <a:t>Verifique el estado:</a:t>
             </a:r>
             <a:r>
               <a:rPr sz="1600" b="0" i="0">
@@ -9036,220 +9108,14 @@
                 </a:solidFill>
                 <a:latin typeface="Calibri"/>
               </a:rPr>
-              <a:t> con </a:t>
-            </a:r>
-            <a:r>
-              <a:rPr sz="1600" b="1" i="0">
-                <a:solidFill>
-                  <a:srgbClr val="2B2B2B"/>
-                </a:solidFill>
-                <a:latin typeface="Calibri"/>
-              </a:rPr>
-              <a:t>a quién + qué cambia + en cuánto</a:t>
-            </a:r>
-            <a:r>
-              <a:rPr sz="1600" b="0" i="0">
-                <a:solidFill>
-                  <a:srgbClr val="2B2B2B"/>
-                </a:solidFill>
-                <a:latin typeface="Calibri"/>
-              </a:rPr>
-              <a:t>, y dije de qué tipo es (económico, social, ambiental o institucional).</a:t>
-            </a:r>
-          </a:p>
-          <a:p>
-            <a:pPr>
-              <a:spcAft>
-                <a:spcPts val="1000"/>
-              </a:spcAft>
-            </a:pPr>
-            <a:r>
-              <a:rPr sz="1600" b="0" i="0">
-                <a:solidFill>
-                  <a:srgbClr val="2B2B2B"/>
-                </a:solidFill>
-                <a:latin typeface="Calibri"/>
-              </a:rPr>
-              <a:t>–   ☐ Sé decir en qué </a:t>
-            </a:r>
-            <a:r>
-              <a:rPr sz="1600" b="1" i="0">
-                <a:solidFill>
-                  <a:srgbClr val="2B2B2B"/>
-                </a:solidFill>
-                <a:latin typeface="Calibri"/>
-              </a:rPr>
-              <a:t>escala</a:t>
-            </a:r>
-            <a:r>
-              <a:rPr sz="1600" b="0" i="0">
-                <a:solidFill>
-                  <a:srgbClr val="2B2B2B"/>
-                </a:solidFill>
-                <a:latin typeface="Calibri"/>
-              </a:rPr>
-              <a:t> está hoy mi propuesta (local, regional, nacional) y cuál sería el paso siguiente.</a:t>
-            </a:r>
-          </a:p>
-          <a:p>
-            <a:pPr>
-              <a:spcAft>
-                <a:spcPts val="1000"/>
-              </a:spcAft>
-            </a:pPr>
-            <a:r>
-              <a:rPr sz="1600" b="0" i="0">
-                <a:solidFill>
-                  <a:srgbClr val="2B2B2B"/>
-                </a:solidFill>
-                <a:latin typeface="Calibri"/>
-              </a:rPr>
-              <a:t>–   ☐ Mi pitch </a:t>
-            </a:r>
-            <a:r>
-              <a:rPr sz="1600" b="1" i="0">
-                <a:solidFill>
-                  <a:srgbClr val="2B2B2B"/>
-                </a:solidFill>
-                <a:latin typeface="Calibri"/>
-              </a:rPr>
-              <a:t>empieza por la persona y su dolor</a:t>
-            </a:r>
-            <a:r>
-              <a:rPr sz="1600" b="0" i="0">
-                <a:solidFill>
-                  <a:srgbClr val="2B2B2B"/>
-                </a:solidFill>
-                <a:latin typeface="Calibri"/>
-              </a:rPr>
-              <a:t> — no por la app, la plataforma ni la IA.</a:t>
-            </a:r>
-          </a:p>
-          <a:p>
-            <a:pPr>
-              <a:spcAft>
-                <a:spcPts val="1000"/>
-              </a:spcAft>
-            </a:pPr>
-            <a:r>
-              <a:rPr sz="1600" b="0" i="0">
-                <a:solidFill>
-                  <a:srgbClr val="2B2B2B"/>
-                </a:solidFill>
-                <a:latin typeface="Calibri"/>
-              </a:rPr>
-              <a:t>–   ☐ Mi pitch tiene </a:t>
-            </a:r>
-            <a:r>
-              <a:rPr sz="1600" b="1" i="0">
-                <a:solidFill>
-                  <a:srgbClr val="2B2B2B"/>
-                </a:solidFill>
-                <a:latin typeface="Calibri"/>
-              </a:rPr>
-              <a:t>los cinco tramos</a:t>
-            </a:r>
-            <a:r>
-              <a:rPr sz="1600" b="0" i="0">
-                <a:solidFill>
-                  <a:srgbClr val="2B2B2B"/>
-                </a:solidFill>
-                <a:latin typeface="Calibri"/>
-              </a:rPr>
-              <a:t>, y en el tramo 4 hay </a:t>
-            </a:r>
-            <a:r>
-              <a:rPr sz="1600" b="1" i="0">
-                <a:solidFill>
-                  <a:srgbClr val="2B2B2B"/>
-                </a:solidFill>
-                <a:latin typeface="Calibri"/>
-              </a:rPr>
-              <a:t>un número real</a:t>
-            </a:r>
-            <a:r>
-              <a:rPr sz="1600" b="0" i="0">
-                <a:solidFill>
-                  <a:srgbClr val="2B2B2B"/>
-                </a:solidFill>
-                <a:latin typeface="Calibri"/>
-              </a:rPr>
-              <a:t> salido de mi validación o de mi vigilancia.</a:t>
-            </a:r>
-          </a:p>
-          <a:p>
-            <a:pPr>
-              <a:spcAft>
-                <a:spcPts val="1000"/>
-              </a:spcAft>
-            </a:pPr>
-            <a:r>
-              <a:rPr sz="1600" b="0" i="0">
-                <a:solidFill>
-                  <a:srgbClr val="2B2B2B"/>
-                </a:solidFill>
-                <a:latin typeface="Calibri"/>
-              </a:rPr>
-              <a:t>–   ☐ El tramo 5 </a:t>
-            </a:r>
-            <a:r>
-              <a:rPr sz="1600" b="1" i="0">
-                <a:solidFill>
-                  <a:srgbClr val="2B2B2B"/>
-                </a:solidFill>
-                <a:latin typeface="Calibri"/>
-              </a:rPr>
-              <a:t>pide algo</a:t>
-            </a:r>
-            <a:r>
-              <a:rPr sz="1600" b="0" i="0">
-                <a:solidFill>
-                  <a:srgbClr val="2B2B2B"/>
-                </a:solidFill>
-                <a:latin typeface="Calibri"/>
-              </a:rPr>
-              <a:t> que el otro puede responder con un sí o un no.</a:t>
-            </a:r>
-          </a:p>
-          <a:p>
-            <a:pPr>
-              <a:spcAft>
-                <a:spcPts val="1000"/>
-              </a:spcAft>
-            </a:pPr>
-            <a:r>
-              <a:rPr sz="1600" b="0" i="0">
-                <a:solidFill>
-                  <a:srgbClr val="2B2B2B"/>
-                </a:solidFill>
-                <a:latin typeface="Calibri"/>
-              </a:rPr>
-              <a:t>–   ☐ Lo cronometré y quedó </a:t>
-            </a:r>
-            <a:r>
-              <a:rPr sz="1600" b="1" i="0">
-                <a:solidFill>
-                  <a:srgbClr val="2B2B2B"/>
-                </a:solidFill>
-                <a:latin typeface="Calibri"/>
-              </a:rPr>
-              <a:t>en 60 segundos o menos</a:t>
-            </a:r>
-            <a:r>
-              <a:rPr sz="1600" b="0" i="0">
-                <a:solidFill>
-                  <a:srgbClr val="2B2B2B"/>
-                </a:solidFill>
-                <a:latin typeface="Calibri"/>
-              </a:rPr>
-              <a:t> leyendo a ritmo normal.</a:t>
-            </a:r>
-          </a:p>
-        </p:txBody>
-      </p:sp>
-      <p:sp>
-        <p:nvSpPr>
-          <p:cNvPr id="5" name="TextBox 4"/>
+              <a:t> *subido* no es lo mismo que *entregado*. Lo que no esté en el aula, no está entregado.</a:t>
+            </a:r>
+          </a:p>
+        </p:txBody>
+      </p:sp>
+      <p:sp>
+        <p:nvSpPr>
+          <p:cNvPr id="6" name="TextBox 5"/>
           <p:cNvSpPr txBox="1"/>
           <p:nvPr/>
         </p:nvSpPr>
@@ -9382,7 +9248,7 @@
                 </a:solidFill>
                 <a:latin typeface="Calibri"/>
               </a:rPr>
-              <a:t>Antes de entregar: revise usted mismo (cont.)</a:t>
+              <a:t>Antes de entregar: revise usted mismo</a:t>
             </a:r>
           </a:p>
         </p:txBody>
@@ -9421,7 +9287,7 @@
                 </a:solidFill>
                 <a:latin typeface="Calibri"/>
               </a:rPr>
-              <a:t>–   ☐ El archivo se llama </a:t>
+              <a:t>–   ☐ Mis </a:t>
             </a:r>
             <a:r>
               <a:rPr sz="1600" b="1" i="0">
@@ -9430,7 +9296,7 @@
                 </a:solidFill>
                 <a:latin typeface="Calibri"/>
               </a:rPr>
-              <a:t>`S06_EcosistemaPitch_Apellido`</a:t>
+              <a:t>3 entidades existen</a:t>
             </a:r>
             <a:r>
               <a:rPr sz="1600" b="0" i="0">
@@ -9439,7 +9305,7 @@
                 </a:solidFill>
                 <a:latin typeface="Calibri"/>
               </a:rPr>
-              <a:t> y está en </a:t>
+              <a:t> y escribí su </a:t>
             </a:r>
             <a:r>
               <a:rPr sz="1600" b="1" i="0">
@@ -9448,7 +9314,7 @@
                 </a:solidFill>
                 <a:latin typeface="Calibri"/>
               </a:rPr>
-              <a:t>CDigital</a:t>
+              <a:t>nombre correcto</a:t>
             </a:r>
             <a:r>
               <a:rPr sz="1600" b="0" i="0">
@@ -9457,7 +9323,369 @@
                 </a:solidFill>
                 <a:latin typeface="Calibri"/>
               </a:rPr>
+              <a:t> (lo verifiqué en su sitio), y no son las tres del mismo cuadrante.</a:t>
+            </a:r>
+          </a:p>
+          <a:p>
+            <a:pPr>
+              <a:spcAft>
+                <a:spcPts val="1000"/>
+              </a:spcAft>
+            </a:pPr>
+            <a:r>
+              <a:rPr sz="1600" b="0" i="0">
+                <a:solidFill>
+                  <a:srgbClr val="2B2B2B"/>
+                </a:solidFill>
+                <a:latin typeface="Calibri"/>
+              </a:rPr>
+              <a:t>–   ☐ Cada entidad tiene </a:t>
+            </a:r>
+            <a:r>
+              <a:rPr sz="1600" b="1" i="0">
+                <a:solidFill>
+                  <a:srgbClr val="2B2B2B"/>
+                </a:solidFill>
+                <a:latin typeface="Calibri"/>
+              </a:rPr>
+              <a:t>un solo tipo de encaje</a:t>
+            </a:r>
+            <a:r>
+              <a:rPr sz="1600" b="0" i="0">
+                <a:solidFill>
+                  <a:srgbClr val="2B2B2B"/>
+                </a:solidFill>
+                <a:latin typeface="Calibri"/>
+              </a:rPr>
+              <a:t>: mentoría, capital, networking, infraestructura o validación.</a:t>
+            </a:r>
+          </a:p>
+          <a:p>
+            <a:pPr>
+              <a:spcAft>
+                <a:spcPts val="1000"/>
+              </a:spcAft>
+            </a:pPr>
+            <a:r>
+              <a:rPr sz="1600" b="0" i="0">
+                <a:solidFill>
+                  <a:srgbClr val="2B2B2B"/>
+                </a:solidFill>
+                <a:latin typeface="Calibri"/>
+              </a:rPr>
+              <a:t>–   ☐ Cada pedido es </a:t>
+            </a:r>
+            <a:r>
+              <a:rPr sz="1600" b="1" i="0">
+                <a:solidFill>
+                  <a:srgbClr val="2B2B2B"/>
+                </a:solidFill>
+                <a:latin typeface="Calibri"/>
+              </a:rPr>
+              <a:t>concreto y acotado</a:t>
+            </a:r>
+            <a:r>
+              <a:rPr sz="1600" b="0" i="0">
+                <a:solidFill>
+                  <a:srgbClr val="2B2B2B"/>
+                </a:solidFill>
+                <a:latin typeface="Calibri"/>
+              </a:rPr>
+              <a:t>: dice </a:t>
+            </a:r>
+            <a:r>
+              <a:rPr sz="1600" b="1" i="0">
+                <a:solidFill>
+                  <a:srgbClr val="2B2B2B"/>
+                </a:solidFill>
+                <a:latin typeface="Calibri"/>
+              </a:rPr>
+              <a:t>cuánto</a:t>
+            </a:r>
+            <a:r>
+              <a:rPr sz="1600" b="0" i="0">
+                <a:solidFill>
+                  <a:srgbClr val="2B2B2B"/>
+                </a:solidFill>
+                <a:latin typeface="Calibri"/>
+              </a:rPr>
+              <a:t>, </a:t>
+            </a:r>
+            <a:r>
+              <a:rPr sz="1600" b="1" i="0">
+                <a:solidFill>
+                  <a:srgbClr val="2B2B2B"/>
+                </a:solidFill>
+                <a:latin typeface="Calibri"/>
+              </a:rPr>
+              <a:t>de qué</a:t>
+            </a:r>
+            <a:r>
+              <a:rPr sz="1600" b="0" i="0">
+                <a:solidFill>
+                  <a:srgbClr val="2B2B2B"/>
+                </a:solidFill>
+                <a:latin typeface="Calibri"/>
+              </a:rPr>
+              <a:t> y </a:t>
+            </a:r>
+            <a:r>
+              <a:rPr sz="1600" b="1" i="0">
+                <a:solidFill>
+                  <a:srgbClr val="2B2B2B"/>
+                </a:solidFill>
+                <a:latin typeface="Calibri"/>
+              </a:rPr>
+              <a:t>por cuánto tiempo</a:t>
+            </a:r>
+            <a:r>
+              <a:rPr sz="1600" b="0" i="0">
+                <a:solidFill>
+                  <a:srgbClr val="2B2B2B"/>
+                </a:solidFill>
+                <a:latin typeface="Calibri"/>
+              </a:rPr>
               <a:t>.</a:t>
+            </a:r>
+          </a:p>
+          <a:p>
+            <a:pPr>
+              <a:spcAft>
+                <a:spcPts val="1000"/>
+              </a:spcAft>
+            </a:pPr>
+            <a:r>
+              <a:rPr sz="1600" b="0" i="0">
+                <a:solidFill>
+                  <a:srgbClr val="2B2B2B"/>
+                </a:solidFill>
+                <a:latin typeface="Calibri"/>
+              </a:rPr>
+              <a:t>–   ☐ Escribí mi </a:t>
+            </a:r>
+            <a:r>
+              <a:rPr sz="1600" b="1" i="0">
+                <a:solidFill>
+                  <a:srgbClr val="2B2B2B"/>
+                </a:solidFill>
+                <a:latin typeface="Calibri"/>
+              </a:rPr>
+              <a:t>frase de impacto</a:t>
+            </a:r>
+            <a:r>
+              <a:rPr sz="1600" b="0" i="0">
+                <a:solidFill>
+                  <a:srgbClr val="2B2B2B"/>
+                </a:solidFill>
+                <a:latin typeface="Calibri"/>
+              </a:rPr>
+              <a:t> con </a:t>
+            </a:r>
+            <a:r>
+              <a:rPr sz="1600" b="1" i="0">
+                <a:solidFill>
+                  <a:srgbClr val="2B2B2B"/>
+                </a:solidFill>
+                <a:latin typeface="Calibri"/>
+              </a:rPr>
+              <a:t>a quién + qué cambia + en cuánto</a:t>
+            </a:r>
+            <a:r>
+              <a:rPr sz="1600" b="0" i="0">
+                <a:solidFill>
+                  <a:srgbClr val="2B2B2B"/>
+                </a:solidFill>
+                <a:latin typeface="Calibri"/>
+              </a:rPr>
+              <a:t>, y dije de qué tipo es (económico, social, ambiental o institucional).</a:t>
+            </a:r>
+          </a:p>
+          <a:p>
+            <a:pPr>
+              <a:spcAft>
+                <a:spcPts val="1000"/>
+              </a:spcAft>
+            </a:pPr>
+            <a:r>
+              <a:rPr sz="1600" b="0" i="0">
+                <a:solidFill>
+                  <a:srgbClr val="2B2B2B"/>
+                </a:solidFill>
+                <a:latin typeface="Calibri"/>
+              </a:rPr>
+              <a:t>–   ☐ Sé decir en qué </a:t>
+            </a:r>
+            <a:r>
+              <a:rPr sz="1600" b="1" i="0">
+                <a:solidFill>
+                  <a:srgbClr val="2B2B2B"/>
+                </a:solidFill>
+                <a:latin typeface="Calibri"/>
+              </a:rPr>
+              <a:t>escala</a:t>
+            </a:r>
+            <a:r>
+              <a:rPr sz="1600" b="0" i="0">
+                <a:solidFill>
+                  <a:srgbClr val="2B2B2B"/>
+                </a:solidFill>
+                <a:latin typeface="Calibri"/>
+              </a:rPr>
+              <a:t> está hoy mi propuesta (local, regional, nacional) y cuál sería el paso siguiente.</a:t>
+            </a:r>
+          </a:p>
+          <a:p>
+            <a:pPr>
+              <a:spcAft>
+                <a:spcPts val="1000"/>
+              </a:spcAft>
+            </a:pPr>
+            <a:r>
+              <a:rPr sz="1600" b="0" i="0">
+                <a:solidFill>
+                  <a:srgbClr val="2B2B2B"/>
+                </a:solidFill>
+                <a:latin typeface="Calibri"/>
+              </a:rPr>
+              <a:t>–   ☐ Mi pitch </a:t>
+            </a:r>
+            <a:r>
+              <a:rPr sz="1600" b="1" i="0">
+                <a:solidFill>
+                  <a:srgbClr val="2B2B2B"/>
+                </a:solidFill>
+                <a:latin typeface="Calibri"/>
+              </a:rPr>
+              <a:t>empieza por la persona y su dolor</a:t>
+            </a:r>
+            <a:r>
+              <a:rPr sz="1600" b="0" i="0">
+                <a:solidFill>
+                  <a:srgbClr val="2B2B2B"/>
+                </a:solidFill>
+                <a:latin typeface="Calibri"/>
+              </a:rPr>
+              <a:t> — no por la app, la plataforma ni la IA.</a:t>
+            </a:r>
+          </a:p>
+          <a:p>
+            <a:pPr>
+              <a:spcAft>
+                <a:spcPts val="1000"/>
+              </a:spcAft>
+            </a:pPr>
+            <a:r>
+              <a:rPr sz="1600" b="0" i="0">
+                <a:solidFill>
+                  <a:srgbClr val="2B2B2B"/>
+                </a:solidFill>
+                <a:latin typeface="Calibri"/>
+              </a:rPr>
+              <a:t>–   ☐ Mi pitch tiene </a:t>
+            </a:r>
+            <a:r>
+              <a:rPr sz="1600" b="1" i="0">
+                <a:solidFill>
+                  <a:srgbClr val="2B2B2B"/>
+                </a:solidFill>
+                <a:latin typeface="Calibri"/>
+              </a:rPr>
+              <a:t>los cinco tramos</a:t>
+            </a:r>
+            <a:r>
+              <a:rPr sz="1600" b="0" i="0">
+                <a:solidFill>
+                  <a:srgbClr val="2B2B2B"/>
+                </a:solidFill>
+                <a:latin typeface="Calibri"/>
+              </a:rPr>
+              <a:t>, y en el tramo 4 hay </a:t>
+            </a:r>
+            <a:r>
+              <a:rPr sz="1600" b="1" i="0">
+                <a:solidFill>
+                  <a:srgbClr val="2B2B2B"/>
+                </a:solidFill>
+                <a:latin typeface="Calibri"/>
+              </a:rPr>
+              <a:t>un número real</a:t>
+            </a:r>
+            <a:r>
+              <a:rPr sz="1600" b="0" i="0">
+                <a:solidFill>
+                  <a:srgbClr val="2B2B2B"/>
+                </a:solidFill>
+                <a:latin typeface="Calibri"/>
+              </a:rPr>
+              <a:t> salido de mi validación o de mi vigilancia.</a:t>
+            </a:r>
+          </a:p>
+          <a:p>
+            <a:pPr>
+              <a:spcAft>
+                <a:spcPts val="1000"/>
+              </a:spcAft>
+            </a:pPr>
+            <a:r>
+              <a:rPr sz="1600" b="0" i="0">
+                <a:solidFill>
+                  <a:srgbClr val="2B2B2B"/>
+                </a:solidFill>
+                <a:latin typeface="Calibri"/>
+              </a:rPr>
+              <a:t>–   ☐ El tramo 5 </a:t>
+            </a:r>
+            <a:r>
+              <a:rPr sz="1600" b="1" i="0">
+                <a:solidFill>
+                  <a:srgbClr val="2B2B2B"/>
+                </a:solidFill>
+                <a:latin typeface="Calibri"/>
+              </a:rPr>
+              <a:t>pide algo</a:t>
+            </a:r>
+            <a:r>
+              <a:rPr sz="1600" b="0" i="0">
+                <a:solidFill>
+                  <a:srgbClr val="2B2B2B"/>
+                </a:solidFill>
+                <a:latin typeface="Calibri"/>
+              </a:rPr>
+              <a:t> que el otro puede responder con un sí o un no.</a:t>
+            </a:r>
+          </a:p>
+          <a:p>
+            <a:pPr>
+              <a:spcAft>
+                <a:spcPts val="1000"/>
+              </a:spcAft>
+            </a:pPr>
+            <a:r>
+              <a:rPr sz="1600" b="0" i="0">
+                <a:solidFill>
+                  <a:srgbClr val="2B2B2B"/>
+                </a:solidFill>
+                <a:latin typeface="Calibri"/>
+              </a:rPr>
+              <a:t>–   ☐ Lo cronometré y quedó </a:t>
+            </a:r>
+            <a:r>
+              <a:rPr sz="1600" b="1" i="0">
+                <a:solidFill>
+                  <a:srgbClr val="2B2B2B"/>
+                </a:solidFill>
+                <a:latin typeface="Calibri"/>
+              </a:rPr>
+              <a:t>en 60 segundos o menos</a:t>
+            </a:r>
+            <a:r>
+              <a:rPr sz="1600" b="0" i="0">
+                <a:solidFill>
+                  <a:srgbClr val="2B2B2B"/>
+                </a:solidFill>
+                <a:latin typeface="Calibri"/>
+              </a:rPr>
+              <a:t> leyendo a ritmo normal.</a:t>
             </a:r>
           </a:p>
         </p:txBody>
@@ -9597,7 +9825,7 @@
                 </a:solidFill>
                 <a:latin typeface="Calibri"/>
               </a:rPr>
-              <a:t>Para continuar — la semana en que se cierra la ACA Final</a:t>
+              <a:t>Antes de entregar: revise usted mismo (cont.)</a:t>
             </a:r>
           </a:p>
         </p:txBody>
@@ -9636,7 +9864,7 @@
                 </a:solidFill>
                 <a:latin typeface="Calibri"/>
               </a:rPr>
-              <a:t>–   </a:t>
+              <a:t>–   ☐ El archivo se llama </a:t>
             </a:r>
             <a:r>
               <a:rPr sz="1600" b="1" i="0">
@@ -9645,117 +9873,8 @@
                 </a:solidFill>
                 <a:latin typeface="Calibri"/>
               </a:rPr>
-              <a:t>Tres ideas para llevarse de hoy:</a:t>
-            </a:r>
-          </a:p>
-          <a:p>
-            <a:pPr lvl="1">
-              <a:spcAft>
-                <a:spcPts val="600"/>
-              </a:spcAft>
-            </a:pPr>
-            <a:r>
-              <a:rPr sz="1500" b="0" i="0">
-                <a:solidFill>
-                  <a:srgbClr val="2B2B2B"/>
-                </a:solidFill>
-                <a:latin typeface="Calibri"/>
-              </a:rPr>
-              <a:t>●   1. Una innovación </a:t>
-            </a:r>
-            <a:r>
-              <a:rPr sz="1500" b="1" i="0">
-                <a:solidFill>
-                  <a:srgbClr val="2B2B2B"/>
-                </a:solidFill>
-                <a:latin typeface="Calibri"/>
-              </a:rPr>
-              <a:t>no sobrevive sola</a:t>
-            </a:r>
-            <a:r>
-              <a:rPr sz="1500" b="0" i="0">
-                <a:solidFill>
-                  <a:srgbClr val="2B2B2B"/>
-                </a:solidFill>
-                <a:latin typeface="Calibri"/>
-              </a:rPr>
-              <a:t>: necesita un ecosistema que le dé lo que le falta.</a:t>
-            </a:r>
-          </a:p>
-          <a:p>
-            <a:pPr lvl="1">
-              <a:spcAft>
-                <a:spcPts val="600"/>
-              </a:spcAft>
-            </a:pPr>
-            <a:r>
-              <a:rPr sz="1500" b="0" i="0">
-                <a:solidFill>
-                  <a:srgbClr val="2B2B2B"/>
-                </a:solidFill>
-                <a:latin typeface="Calibri"/>
-              </a:rPr>
-              <a:t>●   2. Una entidad </a:t>
-            </a:r>
-            <a:r>
-              <a:rPr sz="1500" b="1" i="0">
-                <a:solidFill>
-                  <a:srgbClr val="2B2B2B"/>
-                </a:solidFill>
-                <a:latin typeface="Calibri"/>
-              </a:rPr>
-              <a:t>sin un pedido concreto</a:t>
-            </a:r>
-            <a:r>
-              <a:rPr sz="1500" b="0" i="0">
-                <a:solidFill>
-                  <a:srgbClr val="2B2B2B"/>
-                </a:solidFill>
-                <a:latin typeface="Calibri"/>
-              </a:rPr>
-              <a:t> no le sirve todavía.</a:t>
-            </a:r>
-          </a:p>
-          <a:p>
-            <a:pPr lvl="1">
-              <a:spcAft>
-                <a:spcPts val="600"/>
-              </a:spcAft>
-            </a:pPr>
-            <a:r>
-              <a:rPr sz="1500" b="0" i="0">
-                <a:solidFill>
-                  <a:srgbClr val="2B2B2B"/>
-                </a:solidFill>
-                <a:latin typeface="Calibri"/>
-              </a:rPr>
-              <a:t>●   3. Un pitch se gana </a:t>
-            </a:r>
-            <a:r>
-              <a:rPr sz="1500" b="1" i="0">
-                <a:solidFill>
-                  <a:srgbClr val="2B2B2B"/>
-                </a:solidFill>
-                <a:latin typeface="Calibri"/>
-              </a:rPr>
-              <a:t>empezando por la persona</a:t>
-            </a:r>
-            <a:r>
-              <a:rPr sz="1500" b="0" i="0">
-                <a:solidFill>
-                  <a:srgbClr val="2B2B2B"/>
-                </a:solidFill>
-                <a:latin typeface="Calibri"/>
-              </a:rPr>
-              <a:t>, no por la tecnología.</a:t>
-            </a:r>
-          </a:p>
-          <a:p>
-            <a:pPr>
-              <a:spcAft>
-                <a:spcPts val="1000"/>
-              </a:spcAft>
-            </a:pPr>
+              <a:t>`S06_EcosistemaPitch_Apellido`</a:t>
+            </a:r>
             <a:r>
               <a:rPr sz="1600" b="0" i="0">
                 <a:solidFill>
@@ -9763,7 +9882,7 @@
                 </a:solidFill>
                 <a:latin typeface="Calibri"/>
               </a:rPr>
-              <a:t>–   </a:t>
+              <a:t> y está en </a:t>
             </a:r>
             <a:r>
               <a:rPr sz="1600" b="1" i="0">
@@ -9772,7 +9891,7 @@
                 </a:solidFill>
                 <a:latin typeface="Calibri"/>
               </a:rPr>
-              <a:t>(a)</a:t>
+              <a:t>CDigital</a:t>
             </a:r>
             <a:r>
               <a:rPr sz="1600" b="0" i="0">
@@ -9781,217 +9900,7 @@
                 </a:solidFill>
                 <a:latin typeface="Calibri"/>
               </a:rPr>
-              <a:t> Suban su mapa y su guion como </a:t>
-            </a:r>
-            <a:r>
-              <a:rPr sz="1600" b="1" i="0">
-                <a:solidFill>
-                  <a:srgbClr val="2B2B2B"/>
-                </a:solidFill>
-                <a:latin typeface="Calibri"/>
-              </a:rPr>
-              <a:t>`S06_EcosistemaPitch_Apellido`</a:t>
-            </a:r>
-            <a:r>
-              <a:rPr sz="1600" b="0" i="0">
-                <a:solidFill>
-                  <a:srgbClr val="2B2B2B"/>
-                </a:solidFill>
-                <a:latin typeface="Calibri"/>
-              </a:rPr>
-              <a:t> a </a:t>
-            </a:r>
-            <a:r>
-              <a:rPr sz="1600" b="1" i="0">
-                <a:solidFill>
-                  <a:srgbClr val="2B2B2B"/>
-                </a:solidFill>
-                <a:latin typeface="Calibri"/>
-              </a:rPr>
-              <a:t>CDigital</a:t>
-            </a:r>
-            <a:r>
-              <a:rPr sz="1600" b="0" i="0">
-                <a:solidFill>
-                  <a:srgbClr val="2B2B2B"/>
-                </a:solidFill>
-                <a:latin typeface="Calibri"/>
-              </a:rPr>
-              <a:t>: [URL CDigital — campus del curso pendiente]</a:t>
-            </a:r>
-          </a:p>
-          <a:p>
-            <a:pPr>
-              <a:spcAft>
-                <a:spcPts val="1000"/>
-              </a:spcAft>
-            </a:pPr>
-            <a:r>
-              <a:rPr sz="1600" b="0" i="0">
-                <a:solidFill>
-                  <a:srgbClr val="2B2B2B"/>
-                </a:solidFill>
-                <a:latin typeface="Calibri"/>
-              </a:rPr>
-              <a:t>–   </a:t>
-            </a:r>
-            <a:r>
-              <a:rPr sz="1600" b="1" i="0">
-                <a:solidFill>
-                  <a:srgbClr val="2B2B2B"/>
-                </a:solidFill>
-                <a:latin typeface="Calibri"/>
-              </a:rPr>
-              <a:t>(b)</a:t>
-            </a:r>
-            <a:r>
-              <a:rPr sz="1600" b="0" i="0">
-                <a:solidFill>
-                  <a:srgbClr val="2B2B2B"/>
-                </a:solidFill>
-                <a:latin typeface="Calibri"/>
-              </a:rPr>
-              <a:t> </a:t>
-            </a:r>
-            <a:r>
-              <a:rPr sz="1600" b="1" i="0">
-                <a:solidFill>
-                  <a:srgbClr val="2B2B2B"/>
-                </a:solidFill>
-                <a:latin typeface="Calibri"/>
-              </a:rPr>
-              <a:t>Esta es la semana de la ACA Final.</a:t>
-            </a:r>
-            <a:r>
-              <a:rPr sz="1600" b="0" i="0">
-                <a:solidFill>
-                  <a:srgbClr val="2B2B2B"/>
-                </a:solidFill>
-                <a:latin typeface="Calibri"/>
-              </a:rPr>
-              <a:t> Arme el </a:t>
-            </a:r>
-            <a:r>
-              <a:rPr sz="1600" b="1" i="0">
-                <a:solidFill>
-                  <a:srgbClr val="2B2B2B"/>
-                </a:solidFill>
-                <a:latin typeface="Calibri"/>
-              </a:rPr>
-              <a:t>paquete consolidado</a:t>
-            </a:r>
-            <a:r>
-              <a:rPr sz="1600" b="0" i="0">
-                <a:solidFill>
-                  <a:srgbClr val="2B2B2B"/>
-                </a:solidFill>
-                <a:latin typeface="Calibri"/>
-              </a:rPr>
-              <a:t> con lo que ya tiene: ficha del problema · ficha Oslo · matriz de tipos · Canvas, MVP y validación · tablero de vigilancia · mapa de entidades · guion del pitch.</a:t>
-            </a:r>
-          </a:p>
-          <a:p>
-            <a:pPr lvl="1">
-              <a:spcAft>
-                <a:spcPts val="600"/>
-              </a:spcAft>
-            </a:pPr>
-            <a:r>
-              <a:rPr sz="1500" b="0" i="0">
-                <a:solidFill>
-                  <a:srgbClr val="2B2B2B"/>
-                </a:solidFill>
-                <a:latin typeface="Calibri"/>
-              </a:rPr>
-              <a:t>●   </a:t>
-            </a:r>
-            <a:r>
-              <a:rPr sz="1500" b="1" i="0">
-                <a:solidFill>
-                  <a:srgbClr val="2B2B2B"/>
-                </a:solidFill>
-                <a:latin typeface="Calibri"/>
-              </a:rPr>
-              <a:t>Nada de esto hay que inventarlo ahora</a:t>
-            </a:r>
-            <a:r>
-              <a:rPr sz="1500" b="0" i="0">
-                <a:solidFill>
-                  <a:srgbClr val="2B2B2B"/>
-                </a:solidFill>
-                <a:latin typeface="Calibri"/>
-              </a:rPr>
-              <a:t>: son documentos que ya existen. Lo que falta es </a:t>
-            </a:r>
-            <a:r>
-              <a:rPr sz="1500" b="1" i="0">
-                <a:solidFill>
-                  <a:srgbClr val="2B2B2B"/>
-                </a:solidFill>
-                <a:latin typeface="Calibri"/>
-              </a:rPr>
-              <a:t>integrarlos en un solo texto</a:t>
-            </a:r>
-            <a:r>
-              <a:rPr sz="1500" b="0" i="0">
-                <a:solidFill>
-                  <a:srgbClr val="2B2B2B"/>
-                </a:solidFill>
-                <a:latin typeface="Calibri"/>
-              </a:rPr>
-              <a:t> y que el usuario sea el mismo en todos.</a:t>
-            </a:r>
-          </a:p>
-          <a:p>
-            <a:pPr>
-              <a:spcAft>
-                <a:spcPts val="1000"/>
-              </a:spcAft>
-            </a:pPr>
-            <a:r>
-              <a:rPr sz="1600" b="0" i="0">
-                <a:solidFill>
-                  <a:srgbClr val="2B2B2B"/>
-                </a:solidFill>
-                <a:latin typeface="Calibri"/>
-              </a:rPr>
-              <a:t>–   </a:t>
-            </a:r>
-            <a:r>
-              <a:rPr sz="1600" b="1" i="0">
-                <a:solidFill>
-                  <a:srgbClr val="2B2B2B"/>
-                </a:solidFill>
-                <a:latin typeface="Calibri"/>
-              </a:rPr>
-              <a:t>(c)</a:t>
-            </a:r>
-            <a:r>
-              <a:rPr sz="1600" b="0" i="0">
-                <a:solidFill>
-                  <a:srgbClr val="2B2B2B"/>
-                </a:solidFill>
-                <a:latin typeface="Calibri"/>
-              </a:rPr>
-              <a:t> </a:t>
-            </a:r>
-            <a:r>
-              <a:rPr sz="1600" b="1" i="0">
-                <a:solidFill>
-                  <a:srgbClr val="2B2B2B"/>
-                </a:solidFill>
-                <a:latin typeface="Calibri"/>
-              </a:rPr>
-              <a:t>Revisen en CDigital la rúbrica y el espacio de entrega (EV) de la ACA Final</a:t>
-            </a:r>
-            <a:r>
-              <a:rPr sz="1600" b="0" i="0">
-                <a:solidFill>
-                  <a:srgbClr val="2B2B2B"/>
-                </a:solidFill>
-                <a:latin typeface="Calibri"/>
-              </a:rPr>
-              <a:t> antes de subir, y verifiquen ahí la fecha exacta de cierre. Cerrado el espacio, la nota es la que hay.</a:t>
+              <a:t>.</a:t>
             </a:r>
           </a:p>
         </p:txBody>
@@ -10131,7 +10040,7 @@
                 </a:solidFill>
                 <a:latin typeface="Calibri"/>
               </a:rPr>
-              <a:t>Para continuar — la semana en que se cierra la ACA Final (cont.)</a:t>
+              <a:t>Para continuar — la semana en que se cierra la ACA Final</a:t>
             </a:r>
           </a:p>
         </p:txBody>
@@ -10179,52 +10088,7 @@
                 </a:solidFill>
                 <a:latin typeface="Calibri"/>
               </a:rPr>
-              <a:t>Próxima sesión — la última:</a:t>
-            </a:r>
-            <a:r>
-              <a:rPr sz="1600" b="0" i="0">
-                <a:solidFill>
-                  <a:srgbClr val="2B2B2B"/>
-                </a:solidFill>
-                <a:latin typeface="Calibri"/>
-              </a:rPr>
-              <a:t> </a:t>
-            </a:r>
-            <a:r>
-              <a:rPr sz="1600" b="1" i="0">
-                <a:solidFill>
-                  <a:srgbClr val="2B2B2B"/>
-                </a:solidFill>
-                <a:latin typeface="Calibri"/>
-              </a:rPr>
-              <a:t>taller de consolidación y sustentación</a:t>
-            </a:r>
-            <a:r>
-              <a:rPr sz="1600" b="0" i="0">
-                <a:solidFill>
-                  <a:srgbClr val="2B2B2B"/>
-                </a:solidFill>
-                <a:latin typeface="Calibri"/>
-              </a:rPr>
-              <a:t>. Ya no se entrega nada nuevo: cada quien </a:t>
-            </a:r>
-            <a:r>
-              <a:rPr sz="1600" b="1" i="0">
-                <a:solidFill>
-                  <a:srgbClr val="2B2B2B"/>
-                </a:solidFill>
-                <a:latin typeface="Calibri"/>
-              </a:rPr>
-              <a:t>sustenta su propuesta con el pitch</a:t>
-            </a:r>
-            <a:r>
-              <a:rPr sz="1600" b="0" i="0">
-                <a:solidFill>
-                  <a:srgbClr val="2B2B2B"/>
-                </a:solidFill>
-                <a:latin typeface="Calibri"/>
-              </a:rPr>
-              <a:t>, recibe retroalimentación y se cierra el curso.</a:t>
+              <a:t>Tres ideas para llevarse de hoy:</a:t>
             </a:r>
           </a:p>
           <a:p>
@@ -10240,7 +10104,337 @@
                 </a:solidFill>
                 <a:latin typeface="Calibri"/>
               </a:rPr>
-              <a:t>●   Vengan con el pitch ensayado y con el documento abierto. Se habla, no se lee.</a:t>
+              <a:t>●   1. Una innovación </a:t>
+            </a:r>
+            <a:r>
+              <a:rPr sz="1500" b="1" i="0">
+                <a:solidFill>
+                  <a:srgbClr val="2B2B2B"/>
+                </a:solidFill>
+                <a:latin typeface="Calibri"/>
+              </a:rPr>
+              <a:t>no sobrevive sola</a:t>
+            </a:r>
+            <a:r>
+              <a:rPr sz="1500" b="0" i="0">
+                <a:solidFill>
+                  <a:srgbClr val="2B2B2B"/>
+                </a:solidFill>
+                <a:latin typeface="Calibri"/>
+              </a:rPr>
+              <a:t>: necesita un ecosistema que le dé lo que le falta.</a:t>
+            </a:r>
+          </a:p>
+          <a:p>
+            <a:pPr lvl="1">
+              <a:spcAft>
+                <a:spcPts val="600"/>
+              </a:spcAft>
+            </a:pPr>
+            <a:r>
+              <a:rPr sz="1500" b="0" i="0">
+                <a:solidFill>
+                  <a:srgbClr val="2B2B2B"/>
+                </a:solidFill>
+                <a:latin typeface="Calibri"/>
+              </a:rPr>
+              <a:t>●   2. Una entidad </a:t>
+            </a:r>
+            <a:r>
+              <a:rPr sz="1500" b="1" i="0">
+                <a:solidFill>
+                  <a:srgbClr val="2B2B2B"/>
+                </a:solidFill>
+                <a:latin typeface="Calibri"/>
+              </a:rPr>
+              <a:t>sin un pedido concreto</a:t>
+            </a:r>
+            <a:r>
+              <a:rPr sz="1500" b="0" i="0">
+                <a:solidFill>
+                  <a:srgbClr val="2B2B2B"/>
+                </a:solidFill>
+                <a:latin typeface="Calibri"/>
+              </a:rPr>
+              <a:t> no le sirve todavía.</a:t>
+            </a:r>
+          </a:p>
+          <a:p>
+            <a:pPr lvl="1">
+              <a:spcAft>
+                <a:spcPts val="600"/>
+              </a:spcAft>
+            </a:pPr>
+            <a:r>
+              <a:rPr sz="1500" b="0" i="0">
+                <a:solidFill>
+                  <a:srgbClr val="2B2B2B"/>
+                </a:solidFill>
+                <a:latin typeface="Calibri"/>
+              </a:rPr>
+              <a:t>●   3. Un pitch se gana </a:t>
+            </a:r>
+            <a:r>
+              <a:rPr sz="1500" b="1" i="0">
+                <a:solidFill>
+                  <a:srgbClr val="2B2B2B"/>
+                </a:solidFill>
+                <a:latin typeface="Calibri"/>
+              </a:rPr>
+              <a:t>empezando por la persona</a:t>
+            </a:r>
+            <a:r>
+              <a:rPr sz="1500" b="0" i="0">
+                <a:solidFill>
+                  <a:srgbClr val="2B2B2B"/>
+                </a:solidFill>
+                <a:latin typeface="Calibri"/>
+              </a:rPr>
+              <a:t>, no por la tecnología.</a:t>
+            </a:r>
+          </a:p>
+          <a:p>
+            <a:pPr>
+              <a:spcAft>
+                <a:spcPts val="1000"/>
+              </a:spcAft>
+            </a:pPr>
+            <a:r>
+              <a:rPr sz="1600" b="0" i="0">
+                <a:solidFill>
+                  <a:srgbClr val="2B2B2B"/>
+                </a:solidFill>
+                <a:latin typeface="Calibri"/>
+              </a:rPr>
+              <a:t>–   </a:t>
+            </a:r>
+            <a:r>
+              <a:rPr sz="1600" b="1" i="0">
+                <a:solidFill>
+                  <a:srgbClr val="2B2B2B"/>
+                </a:solidFill>
+                <a:latin typeface="Calibri"/>
+              </a:rPr>
+              <a:t>(a)</a:t>
+            </a:r>
+            <a:r>
+              <a:rPr sz="1600" b="0" i="0">
+                <a:solidFill>
+                  <a:srgbClr val="2B2B2B"/>
+                </a:solidFill>
+                <a:latin typeface="Calibri"/>
+              </a:rPr>
+              <a:t> Suban su mapa y su guion como </a:t>
+            </a:r>
+            <a:r>
+              <a:rPr sz="1600" b="1" i="0">
+                <a:solidFill>
+                  <a:srgbClr val="2B2B2B"/>
+                </a:solidFill>
+                <a:latin typeface="Calibri"/>
+              </a:rPr>
+              <a:t>`S06_EcosistemaPitch_Apellido`</a:t>
+            </a:r>
+            <a:r>
+              <a:rPr sz="1600" b="0" i="0">
+                <a:solidFill>
+                  <a:srgbClr val="2B2B2B"/>
+                </a:solidFill>
+                <a:latin typeface="Calibri"/>
+              </a:rPr>
+              <a:t> a </a:t>
+            </a:r>
+            <a:r>
+              <a:rPr sz="1600" b="1" i="0">
+                <a:solidFill>
+                  <a:srgbClr val="2B2B2B"/>
+                </a:solidFill>
+                <a:latin typeface="Calibri"/>
+              </a:rPr>
+              <a:t>CDigital</a:t>
+            </a:r>
+            <a:r>
+              <a:rPr sz="1600" b="0" i="0">
+                <a:solidFill>
+                  <a:srgbClr val="2B2B2B"/>
+                </a:solidFill>
+                <a:latin typeface="Calibri"/>
+              </a:rPr>
+              <a:t>: https://cdigital.cun.edu.co/course/view.php?id=115463</a:t>
+            </a:r>
+          </a:p>
+          <a:p>
+            <a:pPr>
+              <a:spcAft>
+                <a:spcPts val="1000"/>
+              </a:spcAft>
+            </a:pPr>
+            <a:r>
+              <a:rPr sz="1600" b="0" i="0">
+                <a:solidFill>
+                  <a:srgbClr val="2B2B2B"/>
+                </a:solidFill>
+                <a:latin typeface="Calibri"/>
+              </a:rPr>
+              <a:t>–   </a:t>
+            </a:r>
+            <a:r>
+              <a:rPr sz="1600" b="1" i="0">
+                <a:solidFill>
+                  <a:srgbClr val="2B2B2B"/>
+                </a:solidFill>
+                <a:latin typeface="Calibri"/>
+              </a:rPr>
+              <a:t>(b)</a:t>
+            </a:r>
+            <a:r>
+              <a:rPr sz="1600" b="0" i="0">
+                <a:solidFill>
+                  <a:srgbClr val="2B2B2B"/>
+                </a:solidFill>
+                <a:latin typeface="Calibri"/>
+              </a:rPr>
+              <a:t> </a:t>
+            </a:r>
+            <a:r>
+              <a:rPr sz="1600" b="1" i="0">
+                <a:solidFill>
+                  <a:srgbClr val="2B2B2B"/>
+                </a:solidFill>
+                <a:latin typeface="Calibri"/>
+              </a:rPr>
+              <a:t>Esta es la semana de la ACA Final.</a:t>
+            </a:r>
+            <a:r>
+              <a:rPr sz="1600" b="0" i="0">
+                <a:solidFill>
+                  <a:srgbClr val="2B2B2B"/>
+                </a:solidFill>
+                <a:latin typeface="Calibri"/>
+              </a:rPr>
+              <a:t> Arme el </a:t>
+            </a:r>
+            <a:r>
+              <a:rPr sz="1600" b="1" i="0">
+                <a:solidFill>
+                  <a:srgbClr val="2B2B2B"/>
+                </a:solidFill>
+                <a:latin typeface="Calibri"/>
+              </a:rPr>
+              <a:t>paquete consolidado</a:t>
+            </a:r>
+            <a:r>
+              <a:rPr sz="1600" b="0" i="0">
+                <a:solidFill>
+                  <a:srgbClr val="2B2B2B"/>
+                </a:solidFill>
+                <a:latin typeface="Calibri"/>
+              </a:rPr>
+              <a:t> con lo que ya tiene: ficha del problema · ficha Oslo · matriz de tipos · Canvas, MVP y validación · tablero de vigilancia · mapa de entidades · guion del pitch.</a:t>
+            </a:r>
+          </a:p>
+          <a:p>
+            <a:pPr lvl="1">
+              <a:spcAft>
+                <a:spcPts val="600"/>
+              </a:spcAft>
+            </a:pPr>
+            <a:r>
+              <a:rPr sz="1500" b="0" i="0">
+                <a:solidFill>
+                  <a:srgbClr val="2B2B2B"/>
+                </a:solidFill>
+                <a:latin typeface="Calibri"/>
+              </a:rPr>
+              <a:t>●   </a:t>
+            </a:r>
+            <a:r>
+              <a:rPr sz="1500" b="1" i="0">
+                <a:solidFill>
+                  <a:srgbClr val="2B2B2B"/>
+                </a:solidFill>
+                <a:latin typeface="Calibri"/>
+              </a:rPr>
+              <a:t>Nada de esto hay que inventarlo ahora</a:t>
+            </a:r>
+            <a:r>
+              <a:rPr sz="1500" b="0" i="0">
+                <a:solidFill>
+                  <a:srgbClr val="2B2B2B"/>
+                </a:solidFill>
+                <a:latin typeface="Calibri"/>
+              </a:rPr>
+              <a:t>: son documentos que ya existen. Lo que falta es </a:t>
+            </a:r>
+            <a:r>
+              <a:rPr sz="1500" b="1" i="0">
+                <a:solidFill>
+                  <a:srgbClr val="2B2B2B"/>
+                </a:solidFill>
+                <a:latin typeface="Calibri"/>
+              </a:rPr>
+              <a:t>integrarlos en un solo texto</a:t>
+            </a:r>
+            <a:r>
+              <a:rPr sz="1500" b="0" i="0">
+                <a:solidFill>
+                  <a:srgbClr val="2B2B2B"/>
+                </a:solidFill>
+                <a:latin typeface="Calibri"/>
+              </a:rPr>
+              <a:t> y que el usuario sea el mismo en todos.</a:t>
+            </a:r>
+          </a:p>
+          <a:p>
+            <a:pPr>
+              <a:spcAft>
+                <a:spcPts val="1000"/>
+              </a:spcAft>
+            </a:pPr>
+            <a:r>
+              <a:rPr sz="1600" b="0" i="0">
+                <a:solidFill>
+                  <a:srgbClr val="2B2B2B"/>
+                </a:solidFill>
+                <a:latin typeface="Calibri"/>
+              </a:rPr>
+              <a:t>–   </a:t>
+            </a:r>
+            <a:r>
+              <a:rPr sz="1600" b="1" i="0">
+                <a:solidFill>
+                  <a:srgbClr val="2B2B2B"/>
+                </a:solidFill>
+                <a:latin typeface="Calibri"/>
+              </a:rPr>
+              <a:t>(c)</a:t>
+            </a:r>
+            <a:r>
+              <a:rPr sz="1600" b="0" i="0">
+                <a:solidFill>
+                  <a:srgbClr val="2B2B2B"/>
+                </a:solidFill>
+                <a:latin typeface="Calibri"/>
+              </a:rPr>
+              <a:t> </a:t>
+            </a:r>
+            <a:r>
+              <a:rPr sz="1600" b="1" i="0">
+                <a:solidFill>
+                  <a:srgbClr val="2B2B2B"/>
+                </a:solidFill>
+                <a:latin typeface="Calibri"/>
+              </a:rPr>
+              <a:t>Revisen en CDigital la rúbrica y el espacio de entrega (EV) de la ACA Final</a:t>
+            </a:r>
+            <a:r>
+              <a:rPr sz="1600" b="0" i="0">
+                <a:solidFill>
+                  <a:srgbClr val="2B2B2B"/>
+                </a:solidFill>
+                <a:latin typeface="Calibri"/>
+              </a:rPr>
+              <a:t> antes de subir, y verifiquen ahí la fecha exacta de cierre. Cerrado el espacio, la nota es la que hay.</a:t>
             </a:r>
           </a:p>
         </p:txBody>
@@ -10289,6 +10483,1463 @@
 </file>
 
 <file path=ppt/slides/slide24.xml><?xml version="1.0" encoding="utf-8"?>
+<p:sld xmlns:a="http://schemas.openxmlformats.org/drawingml/2006/main" xmlns:p="http://schemas.openxmlformats.org/presentationml/2006/main" xmlns:r="http://schemas.openxmlformats.org/officeDocument/2006/relationships">
+  <p:cSld>
+    <p:bg>
+      <p:bgPr>
+        <a:solidFill>
+          <a:srgbClr val="FFFFFF"/>
+        </a:solidFill>
+        <a:effectLst/>
+      </p:bgPr>
+    </p:bg>
+    <p:spTree>
+      <p:nvGrpSpPr>
+        <p:cNvPr id="1" name=""/>
+        <p:cNvGrpSpPr/>
+        <p:nvPr/>
+      </p:nvGrpSpPr>
+      <p:grpSpPr/>
+      <p:sp>
+        <p:nvSpPr>
+          <p:cNvPr id="2" name="Rectangle 1"/>
+          <p:cNvSpPr/>
+          <p:nvPr/>
+        </p:nvSpPr>
+        <p:spPr>
+          <a:xfrm>
+            <a:off x="0" y="0"/>
+            <a:ext cx="12191695" cy="1188720"/>
+          </a:xfrm>
+          <a:prstGeom prst="rect">
+            <a:avLst/>
+          </a:prstGeom>
+          <a:solidFill>
+            <a:srgbClr val="0C2340"/>
+          </a:solidFill>
+          <a:ln>
+            <a:noFill/>
+          </a:ln>
+          <a:effectLst/>
+        </p:spPr>
+        <p:style>
+          <a:lnRef idx="1">
+            <a:schemeClr val="accent1"/>
+          </a:lnRef>
+          <a:fillRef idx="3">
+            <a:schemeClr val="accent1"/>
+          </a:fillRef>
+          <a:effectRef idx="2">
+            <a:schemeClr val="accent1"/>
+          </a:effectRef>
+          <a:fontRef idx="minor">
+            <a:schemeClr val="lt1"/>
+          </a:fontRef>
+        </p:style>
+        <p:txBody>
+          <a:bodyPr rtlCol="0" anchor="ctr"/>
+          <a:lstStyle/>
+          <a:p>
+            <a:pPr algn="ctr"/>
+          </a:p>
+        </p:txBody>
+      </p:sp>
+      <p:sp>
+        <p:nvSpPr>
+          <p:cNvPr id="3" name="TextBox 2"/>
+          <p:cNvSpPr txBox="1"/>
+          <p:nvPr/>
+        </p:nvSpPr>
+        <p:spPr>
+          <a:xfrm>
+            <a:off x="640080" y="0"/>
+            <a:ext cx="9082735" cy="1188720"/>
+          </a:xfrm>
+          <a:prstGeom prst="rect">
+            <a:avLst/>
+          </a:prstGeom>
+          <a:noFill/>
+        </p:spPr>
+        <p:txBody>
+          <a:bodyPr wrap="square" anchor="ctr" lIns="0" rIns="0" tIns="0" bIns="0">
+            <a:spAutoFit/>
+          </a:bodyPr>
+          <a:lstStyle/>
+          <a:p>
+            <a:pPr algn="ctr"/>
+            <a:r>
+              <a:rPr sz="2600" b="1" i="0">
+                <a:solidFill>
+                  <a:srgbClr val="FFFFFF"/>
+                </a:solidFill>
+                <a:latin typeface="Calibri"/>
+              </a:rPr>
+              <a:t>Para continuar — la semana en que se cierra la ACA Final (cont.)</a:t>
+            </a:r>
+          </a:p>
+        </p:txBody>
+      </p:sp>
+      <p:sp>
+        <p:nvSpPr>
+          <p:cNvPr id="4" name="TextBox 3"/>
+          <p:cNvSpPr txBox="1"/>
+          <p:nvPr/>
+        </p:nvSpPr>
+        <p:spPr>
+          <a:xfrm>
+            <a:off x="640080" y="1691639"/>
+            <a:ext cx="10911535" cy="4617720"/>
+          </a:xfrm>
+          <a:prstGeom prst="rect">
+            <a:avLst/>
+          </a:prstGeom>
+          <a:noFill/>
+        </p:spPr>
+        <p:txBody>
+          <a:bodyPr wrap="square" anchor="t" lIns="0" rIns="0" tIns="0" bIns="0">
+            <a:spAutoFit/>
+          </a:bodyPr>
+          <a:lstStyle/>
+          <a:p>
+            <a:pPr>
+              <a:spcAft>
+                <a:spcPts val="1000"/>
+              </a:spcAft>
+            </a:pPr>
+            <a:r>
+              <a:rPr sz="1600" b="0" i="0">
+                <a:solidFill>
+                  <a:srgbClr val="2B2B2B"/>
+                </a:solidFill>
+                <a:latin typeface="Calibri"/>
+              </a:rPr>
+              <a:t>–   </a:t>
+            </a:r>
+            <a:r>
+              <a:rPr sz="1600" b="1" i="0">
+                <a:solidFill>
+                  <a:srgbClr val="2B2B2B"/>
+                </a:solidFill>
+                <a:latin typeface="Calibri"/>
+              </a:rPr>
+              <a:t>Próxima sesión — la última:</a:t>
+            </a:r>
+            <a:r>
+              <a:rPr sz="1600" b="0" i="0">
+                <a:solidFill>
+                  <a:srgbClr val="2B2B2B"/>
+                </a:solidFill>
+                <a:latin typeface="Calibri"/>
+              </a:rPr>
+              <a:t> </a:t>
+            </a:r>
+            <a:r>
+              <a:rPr sz="1600" b="1" i="0">
+                <a:solidFill>
+                  <a:srgbClr val="2B2B2B"/>
+                </a:solidFill>
+                <a:latin typeface="Calibri"/>
+              </a:rPr>
+              <a:t>taller de consolidación y sustentación</a:t>
+            </a:r>
+            <a:r>
+              <a:rPr sz="1600" b="0" i="0">
+                <a:solidFill>
+                  <a:srgbClr val="2B2B2B"/>
+                </a:solidFill>
+                <a:latin typeface="Calibri"/>
+              </a:rPr>
+              <a:t>. Ya no se entrega nada nuevo: cada quien </a:t>
+            </a:r>
+            <a:r>
+              <a:rPr sz="1600" b="1" i="0">
+                <a:solidFill>
+                  <a:srgbClr val="2B2B2B"/>
+                </a:solidFill>
+                <a:latin typeface="Calibri"/>
+              </a:rPr>
+              <a:t>sustenta su propuesta con el pitch</a:t>
+            </a:r>
+            <a:r>
+              <a:rPr sz="1600" b="0" i="0">
+                <a:solidFill>
+                  <a:srgbClr val="2B2B2B"/>
+                </a:solidFill>
+                <a:latin typeface="Calibri"/>
+              </a:rPr>
+              <a:t>, recibe retroalimentación y se cierra el curso.</a:t>
+            </a:r>
+          </a:p>
+          <a:p>
+            <a:pPr lvl="1">
+              <a:spcAft>
+                <a:spcPts val="600"/>
+              </a:spcAft>
+            </a:pPr>
+            <a:r>
+              <a:rPr sz="1500" b="0" i="0">
+                <a:solidFill>
+                  <a:srgbClr val="2B2B2B"/>
+                </a:solidFill>
+                <a:latin typeface="Calibri"/>
+              </a:rPr>
+              <a:t>●   Vengan con el pitch ensayado y con el documento abierto. Se habla, no se lee.</a:t>
+            </a:r>
+          </a:p>
+        </p:txBody>
+      </p:sp>
+      <p:sp>
+        <p:nvSpPr>
+          <p:cNvPr id="5" name="TextBox 4"/>
+          <p:cNvSpPr txBox="1"/>
+          <p:nvPr/>
+        </p:nvSpPr>
+        <p:spPr>
+          <a:xfrm>
+            <a:off x="11094415" y="6446520"/>
+            <a:ext cx="548640" cy="274320"/>
+          </a:xfrm>
+          <a:prstGeom prst="rect">
+            <a:avLst/>
+          </a:prstGeom>
+          <a:noFill/>
+        </p:spPr>
+        <p:txBody>
+          <a:bodyPr wrap="square" anchor="t" lIns="0" rIns="0" tIns="0" bIns="0">
+            <a:spAutoFit/>
+          </a:bodyPr>
+          <a:lstStyle/>
+          <a:p>
+            <a:pPr algn="r"/>
+            <a:r>
+              <a:rPr sz="1000" b="1" i="0">
+                <a:solidFill>
+                  <a:srgbClr val="8F989D"/>
+                </a:solidFill>
+                <a:latin typeface="Calibri"/>
+              </a:rPr>
+              <a:t>24</a:t>
+            </a:r>
+          </a:p>
+        </p:txBody>
+      </p:sp>
+    </p:spTree>
+  </p:cSld>
+  <p:clrMapOvr>
+    <a:masterClrMapping/>
+  </p:clrMapOvr>
+</p:sld>
+</file>
+
+<file path=ppt/slides/slide25.xml><?xml version="1.0" encoding="utf-8"?>
+<p:sld xmlns:a="http://schemas.openxmlformats.org/drawingml/2006/main" xmlns:p="http://schemas.openxmlformats.org/presentationml/2006/main" xmlns:r="http://schemas.openxmlformats.org/officeDocument/2006/relationships">
+  <p:cSld>
+    <p:bg>
+      <p:bgPr>
+        <a:solidFill>
+          <a:srgbClr val="FFFFFF"/>
+        </a:solidFill>
+        <a:effectLst/>
+      </p:bgPr>
+    </p:bg>
+    <p:spTree>
+      <p:nvGrpSpPr>
+        <p:cNvPr id="1" name=""/>
+        <p:cNvGrpSpPr/>
+        <p:nvPr/>
+      </p:nvGrpSpPr>
+      <p:grpSpPr/>
+      <p:sp>
+        <p:nvSpPr>
+          <p:cNvPr id="2" name="Rectangle 1"/>
+          <p:cNvSpPr/>
+          <p:nvPr/>
+        </p:nvSpPr>
+        <p:spPr>
+          <a:xfrm>
+            <a:off x="0" y="0"/>
+            <a:ext cx="12191695" cy="1188720"/>
+          </a:xfrm>
+          <a:prstGeom prst="rect">
+            <a:avLst/>
+          </a:prstGeom>
+          <a:solidFill>
+            <a:srgbClr val="0C2340"/>
+          </a:solidFill>
+          <a:ln>
+            <a:noFill/>
+          </a:ln>
+          <a:effectLst/>
+        </p:spPr>
+        <p:style>
+          <a:lnRef idx="1">
+            <a:schemeClr val="accent1"/>
+          </a:lnRef>
+          <a:fillRef idx="3">
+            <a:schemeClr val="accent1"/>
+          </a:fillRef>
+          <a:effectRef idx="2">
+            <a:schemeClr val="accent1"/>
+          </a:effectRef>
+          <a:fontRef idx="minor">
+            <a:schemeClr val="lt1"/>
+          </a:fontRef>
+        </p:style>
+        <p:txBody>
+          <a:bodyPr rtlCol="0" anchor="ctr"/>
+          <a:lstStyle/>
+          <a:p>
+            <a:pPr algn="ctr"/>
+          </a:p>
+        </p:txBody>
+      </p:sp>
+      <p:sp>
+        <p:nvSpPr>
+          <p:cNvPr id="3" name="TextBox 2"/>
+          <p:cNvSpPr txBox="1"/>
+          <p:nvPr/>
+        </p:nvSpPr>
+        <p:spPr>
+          <a:xfrm>
+            <a:off x="640080" y="0"/>
+            <a:ext cx="9082735" cy="1188720"/>
+          </a:xfrm>
+          <a:prstGeom prst="rect">
+            <a:avLst/>
+          </a:prstGeom>
+          <a:noFill/>
+        </p:spPr>
+        <p:txBody>
+          <a:bodyPr wrap="square" anchor="ctr" lIns="0" rIns="0" tIns="0" bIns="0">
+            <a:spAutoFit/>
+          </a:bodyPr>
+          <a:lstStyle/>
+          <a:p>
+            <a:pPr algn="ctr"/>
+            <a:r>
+              <a:rPr sz="2600" b="1" i="0">
+                <a:solidFill>
+                  <a:srgbClr val="FFFFFF"/>
+                </a:solidFill>
+                <a:latin typeface="Calibri"/>
+              </a:rPr>
+              <a:t>RUTA DE ENTREGABLES DEL CURSO</a:t>
+            </a:r>
+          </a:p>
+        </p:txBody>
+      </p:sp>
+      <p:sp>
+        <p:nvSpPr>
+          <p:cNvPr id="4" name="TextBox 3"/>
+          <p:cNvSpPr txBox="1"/>
+          <p:nvPr/>
+        </p:nvSpPr>
+        <p:spPr>
+          <a:xfrm>
+            <a:off x="640080" y="1280160"/>
+            <a:ext cx="10911535" cy="411480"/>
+          </a:xfrm>
+          <a:prstGeom prst="rect">
+            <a:avLst/>
+          </a:prstGeom>
+          <a:noFill/>
+        </p:spPr>
+        <p:txBody>
+          <a:bodyPr wrap="square" anchor="t" lIns="0" rIns="0" tIns="0" bIns="0">
+            <a:spAutoFit/>
+          </a:bodyPr>
+          <a:lstStyle/>
+          <a:p>
+            <a:pPr algn="ctr"/>
+            <a:r>
+              <a:rPr sz="1500" b="0" i="0">
+                <a:solidFill>
+                  <a:srgbClr val="2B2B2B"/>
+                </a:solidFill>
+                <a:latin typeface="Calibri"/>
+              </a:rPr>
+              <a:t>Sin fechas a propósito: aquí va </a:t>
+            </a:r>
+            <a:r>
+              <a:rPr sz="1500" b="1" i="0">
+                <a:solidFill>
+                  <a:srgbClr val="2B2B2B"/>
+                </a:solidFill>
+                <a:latin typeface="Calibri"/>
+              </a:rPr>
+              <a:t>en qué punto del curso</a:t>
+            </a:r>
+            <a:r>
+              <a:rPr sz="1500" b="0" i="0">
+                <a:solidFill>
+                  <a:srgbClr val="2B2B2B"/>
+                </a:solidFill>
+                <a:latin typeface="Calibri"/>
+              </a:rPr>
+              <a:t> cierra cada ítem · la ventana exacta la fija CDigital</a:t>
+            </a:r>
+          </a:p>
+        </p:txBody>
+      </p:sp>
+      <p:graphicFrame>
+        <p:nvGraphicFramePr>
+          <p:cNvPr id="5" name="Table 4"/>
+          <p:cNvGraphicFramePr>
+            <a:graphicFrameLocks noGrp="1"/>
+          </p:cNvGraphicFramePr>
+          <p:nvPr/>
+        </p:nvGraphicFramePr>
+        <p:xfrm>
+          <a:off x="640080" y="2011679"/>
+          <a:ext cx="10911533" cy="4297680"/>
+        </p:xfrm>
+        <a:graphic>
+          <a:graphicData uri="http://schemas.openxmlformats.org/drawingml/2006/table">
+            <a:tbl>
+              <a:tblPr>
+                <a:tableStyleId>{2D5ABB26-0587-4C30-8999-92F81FD0307C}</a:tableStyleId>
+              </a:tblPr>
+              <a:tblGrid>
+                <a:gridCol w="2659113"/>
+                <a:gridCol w="2659113"/>
+                <a:gridCol w="5593307"/>
+              </a:tblGrid>
+              <a:tr h="477520">
+                <a:tc>
+                  <a:txBody>
+                    <a:bodyPr/>
+                    <a:lstStyle/>
+                    <a:p>
+                      <a:pPr algn="l"/>
+                      <a:r>
+                        <a:rPr sz="1300" b="1" i="0">
+                          <a:solidFill>
+                            <a:srgbClr val="FFFFFF"/>
+                          </a:solidFill>
+                          <a:latin typeface="Calibri"/>
+                        </a:rPr>
+                        <a:t>Cierra en la semana de…</a:t>
+                      </a:r>
+                    </a:p>
+                  </a:txBody>
+                  <a:tcPr anchor="ctr" marL="109728" marR="91440" marT="36576" marB="36576">
+                    <a:solidFill>
+                      <a:srgbClr val="0C2340"/>
+                    </a:solidFill>
+                  </a:tcPr>
+                </a:tc>
+                <a:tc>
+                  <a:txBody>
+                    <a:bodyPr/>
+                    <a:lstStyle/>
+                    <a:p>
+                      <a:pPr algn="l"/>
+                      <a:r>
+                        <a:rPr sz="1300" b="1" i="0">
+                          <a:solidFill>
+                            <a:srgbClr val="FFFFFF"/>
+                          </a:solidFill>
+                          <a:latin typeface="Calibri"/>
+                        </a:rPr>
+                        <a:t>Entregable</a:t>
+                      </a:r>
+                    </a:p>
+                  </a:txBody>
+                  <a:tcPr anchor="ctr" marL="109728" marR="91440" marT="36576" marB="36576">
+                    <a:solidFill>
+                      <a:srgbClr val="0C2340"/>
+                    </a:solidFill>
+                  </a:tcPr>
+                </a:tc>
+                <a:tc>
+                  <a:txBody>
+                    <a:bodyPr/>
+                    <a:lstStyle/>
+                    <a:p>
+                      <a:pPr algn="l"/>
+                      <a:r>
+                        <a:rPr sz="1300" b="1" i="0">
+                          <a:solidFill>
+                            <a:srgbClr val="FFFFFF"/>
+                          </a:solidFill>
+                          <a:latin typeface="Calibri"/>
+                        </a:rPr>
+                        <a:t>Qué debes tener listo</a:t>
+                      </a:r>
+                    </a:p>
+                  </a:txBody>
+                  <a:tcPr anchor="ctr" marL="109728" marR="91440" marT="36576" marB="36576">
+                    <a:solidFill>
+                      <a:srgbClr val="0C2340"/>
+                    </a:solidFill>
+                  </a:tcPr>
+                </a:tc>
+              </a:tr>
+              <a:tr h="477520">
+                <a:tc>
+                  <a:txBody>
+                    <a:bodyPr/>
+                    <a:lstStyle/>
+                    <a:p>
+                      <a:pPr algn="l"/>
+                      <a:r>
+                        <a:rPr sz="1100" b="1" i="0">
+                          <a:solidFill>
+                            <a:srgbClr val="2B2B2B"/>
+                          </a:solidFill>
+                          <a:latin typeface="Calibri"/>
+                        </a:rPr>
+                        <a:t>Sesión 02</a:t>
+                      </a:r>
+                      <a:r>
+                        <a:rPr sz="1100" b="0" i="0">
+                          <a:solidFill>
+                            <a:srgbClr val="2B2B2B"/>
+                          </a:solidFill>
+                          <a:latin typeface="Calibri"/>
+                        </a:rPr>
+                        <a:t> · ya cerró</a:t>
+                      </a:r>
+                    </a:p>
+                  </a:txBody>
+                  <a:tcPr anchor="ctr" marL="109728" marR="91440" marT="36576" marB="36576">
+                    <a:solidFill>
+                      <a:srgbClr val="FFFFFF"/>
+                    </a:solidFill>
+                  </a:tcPr>
+                </a:tc>
+                <a:tc>
+                  <a:txBody>
+                    <a:bodyPr/>
+                    <a:lstStyle/>
+                    <a:p>
+                      <a:pPr algn="l"/>
+                      <a:r>
+                        <a:rPr sz="1100" b="1" i="0">
+                          <a:solidFill>
+                            <a:srgbClr val="2B2B2B"/>
+                          </a:solidFill>
+                          <a:latin typeface="Calibri"/>
+                        </a:rPr>
+                        <a:t>Quiz 1</a:t>
+                      </a:r>
+                      <a:r>
+                        <a:rPr sz="1100" b="0" i="0">
+                          <a:solidFill>
+                            <a:srgbClr val="2B2B2B"/>
+                          </a:solidFill>
+                          <a:latin typeface="Calibri"/>
+                        </a:rPr>
+                        <a:t> · Cuestionario · 6%</a:t>
+                      </a:r>
+                    </a:p>
+                  </a:txBody>
+                  <a:tcPr anchor="ctr" marL="109728" marR="91440" marT="36576" marB="36576">
+                    <a:solidFill>
+                      <a:srgbClr val="FFFFFF"/>
+                    </a:solidFill>
+                  </a:tcPr>
+                </a:tc>
+                <a:tc>
+                  <a:txBody>
+                    <a:bodyPr/>
+                    <a:lstStyle/>
+                    <a:p>
+                      <a:pPr algn="l"/>
+                      <a:r>
+                        <a:rPr sz="1100" b="0" i="0">
+                          <a:solidFill>
+                            <a:srgbClr val="2B2B2B"/>
+                          </a:solidFill>
+                          <a:latin typeface="Calibri"/>
+                        </a:rPr>
+                        <a:t>Ten leída la unidad del encuadre: </a:t>
+                      </a:r>
+                      <a:r>
+                        <a:rPr sz="1100" b="1" i="0">
+                          <a:solidFill>
+                            <a:srgbClr val="2B2B2B"/>
+                          </a:solidFill>
+                          <a:latin typeface="Calibri"/>
+                        </a:rPr>
+                        <a:t>Propuesta de Innovación</a:t>
+                      </a:r>
+                      <a:r>
+                        <a:rPr sz="1100" b="0" i="0">
+                          <a:solidFill>
+                            <a:srgbClr val="2B2B2B"/>
+                          </a:solidFill>
+                          <a:latin typeface="Calibri"/>
+                        </a:rPr>
+                        <a:t> e inteligencia emocional.</a:t>
+                      </a:r>
+                    </a:p>
+                  </a:txBody>
+                  <a:tcPr anchor="ctr" marL="109728" marR="91440" marT="36576" marB="36576">
+                    <a:solidFill>
+                      <a:srgbClr val="FFFFFF"/>
+                    </a:solidFill>
+                  </a:tcPr>
+                </a:tc>
+              </a:tr>
+              <a:tr h="477520">
+                <a:tc>
+                  <a:txBody>
+                    <a:bodyPr/>
+                    <a:lstStyle/>
+                    <a:p>
+                      <a:pPr algn="l"/>
+                      <a:r>
+                        <a:rPr sz="1100" b="1" i="0">
+                          <a:solidFill>
+                            <a:srgbClr val="2B2B2B"/>
+                          </a:solidFill>
+                          <a:latin typeface="Calibri"/>
+                        </a:rPr>
+                        <a:t>Sesión 03</a:t>
+                      </a:r>
+                      <a:r>
+                        <a:rPr sz="1100" b="0" i="0">
+                          <a:solidFill>
+                            <a:srgbClr val="2B2B2B"/>
+                          </a:solidFill>
+                          <a:latin typeface="Calibri"/>
+                        </a:rPr>
+                        <a:t> · ya cerró</a:t>
+                      </a:r>
+                    </a:p>
+                  </a:txBody>
+                  <a:tcPr anchor="ctr" marL="109728" marR="91440" marT="36576" marB="36576">
+                    <a:solidFill>
+                      <a:srgbClr val="F2F2F2"/>
+                    </a:solidFill>
+                  </a:tcPr>
+                </a:tc>
+                <a:tc>
+                  <a:txBody>
+                    <a:bodyPr/>
+                    <a:lstStyle/>
+                    <a:p>
+                      <a:pPr algn="l"/>
+                      <a:r>
+                        <a:rPr sz="1100" b="1" i="0">
+                          <a:solidFill>
+                            <a:srgbClr val="2B2B2B"/>
+                          </a:solidFill>
+                          <a:latin typeface="Calibri"/>
+                        </a:rPr>
+                        <a:t>Parcial 1</a:t>
+                      </a:r>
+                      <a:r>
+                        <a:rPr sz="1100" b="0" i="0">
+                          <a:solidFill>
+                            <a:srgbClr val="2B2B2B"/>
+                          </a:solidFill>
+                          <a:latin typeface="Calibri"/>
+                        </a:rPr>
+                        <a:t> · Cuestionario · 24%</a:t>
+                      </a:r>
+                    </a:p>
+                  </a:txBody>
+                  <a:tcPr anchor="ctr" marL="109728" marR="91440" marT="36576" marB="36576">
+                    <a:solidFill>
+                      <a:srgbClr val="F2F2F2"/>
+                    </a:solidFill>
+                  </a:tcPr>
+                </a:tc>
+                <a:tc>
+                  <a:txBody>
+                    <a:bodyPr/>
+                    <a:lstStyle/>
+                    <a:p>
+                      <a:pPr algn="l"/>
+                      <a:r>
+                        <a:rPr sz="1100" b="0" i="0">
+                          <a:solidFill>
+                            <a:srgbClr val="2B2B2B"/>
+                          </a:solidFill>
+                          <a:latin typeface="Calibri"/>
+                        </a:rPr>
+                        <a:t>Domina </a:t>
+                      </a:r>
+                      <a:r>
+                        <a:rPr sz="1100" b="1" i="0">
+                          <a:solidFill>
+                            <a:srgbClr val="2B2B2B"/>
+                          </a:solidFill>
+                          <a:latin typeface="Calibri"/>
+                        </a:rPr>
+                        <a:t>Design Thinking</a:t>
+                      </a:r>
+                      <a:r>
+                        <a:rPr sz="1100" b="0" i="0">
+                          <a:solidFill>
+                            <a:srgbClr val="2B2B2B"/>
+                          </a:solidFill>
+                          <a:latin typeface="Calibri"/>
+                        </a:rPr>
+                        <a:t>, dos técnicas de ideación, bloqueadores y ensanchadores.</a:t>
+                      </a:r>
+                    </a:p>
+                  </a:txBody>
+                  <a:tcPr anchor="ctr" marL="109728" marR="91440" marT="36576" marB="36576">
+                    <a:solidFill>
+                      <a:srgbClr val="F2F2F2"/>
+                    </a:solidFill>
+                  </a:tcPr>
+                </a:tc>
+              </a:tr>
+              <a:tr h="477520">
+                <a:tc>
+                  <a:txBody>
+                    <a:bodyPr/>
+                    <a:lstStyle/>
+                    <a:p>
+                      <a:pPr algn="l"/>
+                      <a:r>
+                        <a:rPr sz="1100" b="1" i="0">
+                          <a:solidFill>
+                            <a:srgbClr val="2B2B2B"/>
+                          </a:solidFill>
+                          <a:latin typeface="Calibri"/>
+                        </a:rPr>
+                        <a:t>Sesión 04</a:t>
+                      </a:r>
+                      <a:r>
+                        <a:rPr sz="1100" b="0" i="0">
+                          <a:solidFill>
+                            <a:srgbClr val="2B2B2B"/>
+                          </a:solidFill>
+                          <a:latin typeface="Calibri"/>
+                        </a:rPr>
+                        <a:t> · ya cerró</a:t>
+                      </a:r>
+                    </a:p>
+                  </a:txBody>
+                  <a:tcPr anchor="ctr" marL="109728" marR="91440" marT="36576" marB="36576">
+                    <a:solidFill>
+                      <a:srgbClr val="FFFFFF"/>
+                    </a:solidFill>
+                  </a:tcPr>
+                </a:tc>
+                <a:tc>
+                  <a:txBody>
+                    <a:bodyPr/>
+                    <a:lstStyle/>
+                    <a:p>
+                      <a:pPr algn="l"/>
+                      <a:r>
+                        <a:rPr sz="1100" b="1" i="0">
+                          <a:solidFill>
+                            <a:srgbClr val="2B2B2B"/>
+                          </a:solidFill>
+                          <a:latin typeface="Calibri"/>
+                        </a:rPr>
+                        <a:t>Quiz 2</a:t>
+                      </a:r>
+                      <a:r>
+                        <a:rPr sz="1100" b="0" i="0">
+                          <a:solidFill>
+                            <a:srgbClr val="2B2B2B"/>
+                          </a:solidFill>
+                          <a:latin typeface="Calibri"/>
+                        </a:rPr>
+                        <a:t> · Cuestionario · 9%</a:t>
+                      </a:r>
+                    </a:p>
+                  </a:txBody>
+                  <a:tcPr anchor="ctr" marL="109728" marR="91440" marT="36576" marB="36576">
+                    <a:solidFill>
+                      <a:srgbClr val="FFFFFF"/>
+                    </a:solidFill>
+                  </a:tcPr>
+                </a:tc>
+                <a:tc>
+                  <a:txBody>
+                    <a:bodyPr/>
+                    <a:lstStyle/>
+                    <a:p>
+                      <a:pPr algn="l"/>
+                      <a:r>
+                        <a:rPr sz="1100" b="0" i="0">
+                          <a:solidFill>
+                            <a:srgbClr val="2B2B2B"/>
+                          </a:solidFill>
+                          <a:latin typeface="Calibri"/>
+                        </a:rPr>
+                        <a:t>Suma el </a:t>
+                      </a:r>
+                      <a:r>
+                        <a:rPr sz="1100" b="1" i="0">
+                          <a:solidFill>
+                            <a:srgbClr val="2B2B2B"/>
+                          </a:solidFill>
+                          <a:latin typeface="Calibri"/>
+                        </a:rPr>
+                        <a:t>Manual de Oslo</a:t>
+                      </a:r>
+                      <a:r>
+                        <a:rPr sz="1100" b="0" i="0">
+                          <a:solidFill>
+                            <a:srgbClr val="2B2B2B"/>
+                          </a:solidFill>
+                          <a:latin typeface="Calibri"/>
+                        </a:rPr>
+                        <a:t>: qué cuenta como innovación y cómo se gestiona; el curso acumula.</a:t>
+                      </a:r>
+                    </a:p>
+                  </a:txBody>
+                  <a:tcPr anchor="ctr" marL="109728" marR="91440" marT="36576" marB="36576">
+                    <a:solidFill>
+                      <a:srgbClr val="FFFFFF"/>
+                    </a:solidFill>
+                  </a:tcPr>
+                </a:tc>
+              </a:tr>
+              <a:tr h="477520">
+                <a:tc>
+                  <a:txBody>
+                    <a:bodyPr/>
+                    <a:lstStyle/>
+                    <a:p>
+                      <a:pPr algn="l"/>
+                      <a:r>
+                        <a:rPr sz="1100" b="1" i="0">
+                          <a:solidFill>
+                            <a:srgbClr val="2B2B2B"/>
+                          </a:solidFill>
+                          <a:latin typeface="Calibri"/>
+                        </a:rPr>
+                        <a:t>Sesión 05</a:t>
+                      </a:r>
+                      <a:r>
+                        <a:rPr sz="1100" b="0" i="0">
+                          <a:solidFill>
+                            <a:srgbClr val="2B2B2B"/>
+                          </a:solidFill>
+                          <a:latin typeface="Calibri"/>
+                        </a:rPr>
+                        <a:t> · ya cerró</a:t>
+                      </a:r>
+                    </a:p>
+                  </a:txBody>
+                  <a:tcPr anchor="ctr" marL="109728" marR="91440" marT="36576" marB="36576">
+                    <a:solidFill>
+                      <a:srgbClr val="F2F2F2"/>
+                    </a:solidFill>
+                  </a:tcPr>
+                </a:tc>
+                <a:tc>
+                  <a:txBody>
+                    <a:bodyPr/>
+                    <a:lstStyle/>
+                    <a:p>
+                      <a:pPr algn="l"/>
+                      <a:r>
+                        <a:rPr sz="1100" b="1" i="0">
+                          <a:solidFill>
+                            <a:srgbClr val="2B2B2B"/>
+                          </a:solidFill>
+                          <a:latin typeface="Calibri"/>
+                        </a:rPr>
+                        <a:t>Parcial 2</a:t>
+                      </a:r>
+                      <a:r>
+                        <a:rPr sz="1100" b="0" i="0">
+                          <a:solidFill>
+                            <a:srgbClr val="2B2B2B"/>
+                          </a:solidFill>
+                          <a:latin typeface="Calibri"/>
+                        </a:rPr>
+                        <a:t> · Cuestionario · 21%</a:t>
+                      </a:r>
+                    </a:p>
+                  </a:txBody>
+                  <a:tcPr anchor="ctr" marL="109728" marR="91440" marT="36576" marB="36576">
+                    <a:solidFill>
+                      <a:srgbClr val="F2F2F2"/>
+                    </a:solidFill>
+                  </a:tcPr>
+                </a:tc>
+                <a:tc>
+                  <a:txBody>
+                    <a:bodyPr/>
+                    <a:lstStyle/>
+                    <a:p>
+                      <a:pPr algn="l"/>
+                      <a:r>
+                        <a:rPr sz="1100" b="0" i="0">
+                          <a:solidFill>
+                            <a:srgbClr val="2B2B2B"/>
+                          </a:solidFill>
+                          <a:latin typeface="Calibri"/>
+                        </a:rPr>
+                        <a:t>Tipifica tu innovación (producto, proceso, organización, marketing, social) y </a:t>
+                      </a:r>
+                      <a:r>
+                        <a:rPr sz="1100" b="1" i="0">
+                          <a:solidFill>
+                            <a:srgbClr val="2B2B2B"/>
+                          </a:solidFill>
+                          <a:latin typeface="Calibri"/>
+                        </a:rPr>
+                        <a:t>justifícala</a:t>
+                      </a:r>
+                      <a:r>
+                        <a:rPr sz="1100" b="0" i="0">
+                          <a:solidFill>
+                            <a:srgbClr val="2B2B2B"/>
+                          </a:solidFill>
+                          <a:latin typeface="Calibri"/>
+                        </a:rPr>
+                        <a:t>.</a:t>
+                      </a:r>
+                    </a:p>
+                  </a:txBody>
+                  <a:tcPr anchor="ctr" marL="109728" marR="91440" marT="36576" marB="36576">
+                    <a:solidFill>
+                      <a:srgbClr val="F2F2F2"/>
+                    </a:solidFill>
+                  </a:tcPr>
+                </a:tc>
+              </a:tr>
+              <a:tr h="477520">
+                <a:tc>
+                  <a:txBody>
+                    <a:bodyPr/>
+                    <a:lstStyle/>
+                    <a:p>
+                      <a:pPr algn="l"/>
+                      <a:r>
+                        <a:rPr sz="1100" b="1" i="0">
+                          <a:solidFill>
+                            <a:srgbClr val="2B2B2B"/>
+                          </a:solidFill>
+                          <a:latin typeface="Calibri"/>
+                        </a:rPr>
+                        <a:t>Sesión 06</a:t>
+                      </a:r>
+                      <a:r>
+                        <a:rPr sz="1100" b="0" i="0">
+                          <a:solidFill>
+                            <a:srgbClr val="2B2B2B"/>
+                          </a:solidFill>
+                          <a:latin typeface="Calibri"/>
+                        </a:rPr>
+                        <a:t> · cierra esta semana</a:t>
+                      </a:r>
+                    </a:p>
+                  </a:txBody>
+                  <a:tcPr anchor="ctr" marL="109728" marR="91440" marT="36576" marB="36576">
+                    <a:solidFill>
+                      <a:srgbClr val="FFFFFF"/>
+                    </a:solidFill>
+                  </a:tcPr>
+                </a:tc>
+                <a:tc>
+                  <a:txBody>
+                    <a:bodyPr/>
+                    <a:lstStyle/>
+                    <a:p>
+                      <a:pPr algn="l"/>
+                      <a:r>
+                        <a:rPr sz="1100" b="1" i="0">
+                          <a:solidFill>
+                            <a:srgbClr val="2B2B2B"/>
+                          </a:solidFill>
+                          <a:latin typeface="Calibri"/>
+                        </a:rPr>
+                        <a:t>ACA Final</a:t>
+                      </a:r>
+                      <a:r>
+                        <a:rPr sz="1100" b="0" i="0">
+                          <a:solidFill>
+                            <a:srgbClr val="2B2B2B"/>
+                          </a:solidFill>
+                          <a:latin typeface="Calibri"/>
+                        </a:rPr>
+                        <a:t> · Tarea · 32,8%</a:t>
+                      </a:r>
+                    </a:p>
+                  </a:txBody>
+                  <a:tcPr anchor="ctr" marL="109728" marR="91440" marT="36576" marB="36576">
+                    <a:solidFill>
+                      <a:srgbClr val="FFFFFF"/>
+                    </a:solidFill>
+                  </a:tcPr>
+                </a:tc>
+                <a:tc>
+                  <a:txBody>
+                    <a:bodyPr/>
+                    <a:lstStyle/>
+                    <a:p>
+                      <a:pPr algn="l"/>
+                      <a:r>
+                        <a:rPr sz="1100" b="0" i="0">
+                          <a:solidFill>
+                            <a:srgbClr val="2B2B2B"/>
+                          </a:solidFill>
+                          <a:latin typeface="Calibri"/>
+                        </a:rPr>
+                        <a:t>Sube la </a:t>
+                      </a:r>
+                      <a:r>
+                        <a:rPr sz="1100" b="1" i="0">
+                          <a:solidFill>
+                            <a:srgbClr val="2B2B2B"/>
+                          </a:solidFill>
+                          <a:latin typeface="Calibri"/>
+                        </a:rPr>
+                        <a:t>propuesta consolidada</a:t>
+                      </a:r>
+                      <a:r>
+                        <a:rPr sz="1100" b="0" i="0">
+                          <a:solidFill>
+                            <a:srgbClr val="2B2B2B"/>
+                          </a:solidFill>
+                          <a:latin typeface="Calibri"/>
+                        </a:rPr>
+                        <a:t>: problema, tipo Oslo, FODA, Canvas, MVP, vigilancia y pitch.</a:t>
+                      </a:r>
+                    </a:p>
+                  </a:txBody>
+                  <a:tcPr anchor="ctr" marL="109728" marR="91440" marT="36576" marB="36576">
+                    <a:solidFill>
+                      <a:srgbClr val="FFFFFF"/>
+                    </a:solidFill>
+                  </a:tcPr>
+                </a:tc>
+              </a:tr>
+              <a:tr h="477520">
+                <a:tc>
+                  <a:txBody>
+                    <a:bodyPr/>
+                    <a:lstStyle/>
+                    <a:p>
+                      <a:pPr algn="l"/>
+                      <a:r>
+                        <a:rPr sz="1100" b="1" i="0">
+                          <a:solidFill>
+                            <a:srgbClr val="2B2B2B"/>
+                          </a:solidFill>
+                          <a:latin typeface="Calibri"/>
+                        </a:rPr>
+                        <a:t>Sesión 06</a:t>
+                      </a:r>
+                      <a:r>
+                        <a:rPr sz="1100" b="0" i="0">
+                          <a:solidFill>
+                            <a:srgbClr val="2B2B2B"/>
+                          </a:solidFill>
+                          <a:latin typeface="Calibri"/>
+                        </a:rPr>
+                        <a:t> · cierra esta semana</a:t>
+                      </a:r>
+                    </a:p>
+                  </a:txBody>
+                  <a:tcPr anchor="ctr" marL="109728" marR="91440" marT="36576" marB="36576">
+                    <a:solidFill>
+                      <a:srgbClr val="F2F2F2"/>
+                    </a:solidFill>
+                  </a:tcPr>
+                </a:tc>
+                <a:tc>
+                  <a:txBody>
+                    <a:bodyPr/>
+                    <a:lstStyle/>
+                    <a:p>
+                      <a:pPr algn="l"/>
+                      <a:r>
+                        <a:rPr sz="1100" b="1" i="0">
+                          <a:solidFill>
+                            <a:srgbClr val="2B2B2B"/>
+                          </a:solidFill>
+                          <a:latin typeface="Calibri"/>
+                        </a:rPr>
+                        <a:t>Quiz 3</a:t>
+                      </a:r>
+                      <a:r>
+                        <a:rPr sz="1100" b="0" i="0">
+                          <a:solidFill>
+                            <a:srgbClr val="2B2B2B"/>
+                          </a:solidFill>
+                          <a:latin typeface="Calibri"/>
+                        </a:rPr>
+                        <a:t> · Cuestionario · 4%</a:t>
+                      </a:r>
+                    </a:p>
+                  </a:txBody>
+                  <a:tcPr anchor="ctr" marL="109728" marR="91440" marT="36576" marB="36576">
+                    <a:solidFill>
+                      <a:srgbClr val="F2F2F2"/>
+                    </a:solidFill>
+                  </a:tcPr>
+                </a:tc>
+                <a:tc>
+                  <a:txBody>
+                    <a:bodyPr/>
+                    <a:lstStyle/>
+                    <a:p>
+                      <a:pPr algn="l"/>
+                      <a:r>
+                        <a:rPr sz="1100" b="0" i="0">
+                          <a:solidFill>
+                            <a:srgbClr val="2B2B2B"/>
+                          </a:solidFill>
+                          <a:latin typeface="Calibri"/>
+                        </a:rPr>
+                        <a:t>Ten claros </a:t>
+                      </a:r>
+                      <a:r>
+                        <a:rPr sz="1100" b="1" i="0">
+                          <a:solidFill>
+                            <a:srgbClr val="2B2B2B"/>
+                          </a:solidFill>
+                          <a:latin typeface="Calibri"/>
+                        </a:rPr>
+                        <a:t>FODA, Canvas y MVP</a:t>
+                      </a:r>
+                      <a:r>
+                        <a:rPr sz="1100" b="0" i="0">
+                          <a:solidFill>
+                            <a:srgbClr val="2B2B2B"/>
+                          </a:solidFill>
+                          <a:latin typeface="Calibri"/>
+                        </a:rPr>
+                        <a:t> (verificable) y para qué sirve la vigilancia tecnológica.</a:t>
+                      </a:r>
+                    </a:p>
+                  </a:txBody>
+                  <a:tcPr anchor="ctr" marL="109728" marR="91440" marT="36576" marB="36576">
+                    <a:solidFill>
+                      <a:srgbClr val="F2F2F2"/>
+                    </a:solidFill>
+                  </a:tcPr>
+                </a:tc>
+              </a:tr>
+              <a:tr h="477520">
+                <a:tc>
+                  <a:txBody>
+                    <a:bodyPr/>
+                    <a:lstStyle/>
+                    <a:p>
+                      <a:pPr algn="l"/>
+                      <a:r>
+                        <a:rPr sz="1100" b="1" i="0">
+                          <a:solidFill>
+                            <a:srgbClr val="2B2B2B"/>
+                          </a:solidFill>
+                          <a:latin typeface="Calibri"/>
+                        </a:rPr>
+                        <a:t>Sesión 07</a:t>
+                      </a:r>
+                      <a:r>
+                        <a:rPr sz="1100" b="0" i="0">
+                          <a:solidFill>
+                            <a:srgbClr val="2B2B2B"/>
+                          </a:solidFill>
+                          <a:latin typeface="Calibri"/>
+                        </a:rPr>
+                        <a:t> · pendiente</a:t>
+                      </a:r>
+                    </a:p>
+                  </a:txBody>
+                  <a:tcPr anchor="ctr" marL="109728" marR="91440" marT="36576" marB="36576">
+                    <a:solidFill>
+                      <a:srgbClr val="FFFFFF"/>
+                    </a:solidFill>
+                  </a:tcPr>
+                </a:tc>
+                <a:tc>
+                  <a:txBody>
+                    <a:bodyPr/>
+                    <a:lstStyle/>
+                    <a:p>
+                      <a:pPr algn="l"/>
+                      <a:r>
+                        <a:rPr sz="1100" b="1" i="0">
+                          <a:solidFill>
+                            <a:srgbClr val="2B2B2B"/>
+                          </a:solidFill>
+                          <a:latin typeface="Calibri"/>
+                        </a:rPr>
+                        <a:t>Autoevaluación</a:t>
+                      </a:r>
+                      <a:r>
+                        <a:rPr sz="1100" b="0" i="0">
+                          <a:solidFill>
+                            <a:srgbClr val="2B2B2B"/>
+                          </a:solidFill>
+                          <a:latin typeface="Calibri"/>
+                        </a:rPr>
+                        <a:t> · Cuestionario · 1,6%</a:t>
+                      </a:r>
+                    </a:p>
+                  </a:txBody>
+                  <a:tcPr anchor="ctr" marL="109728" marR="91440" marT="36576" marB="36576">
+                    <a:solidFill>
+                      <a:srgbClr val="FFFFFF"/>
+                    </a:solidFill>
+                  </a:tcPr>
+                </a:tc>
+                <a:tc>
+                  <a:txBody>
+                    <a:bodyPr/>
+                    <a:lstStyle/>
+                    <a:p>
+                      <a:pPr algn="l"/>
+                      <a:r>
+                        <a:rPr sz="1100" b="0" i="0">
+                          <a:solidFill>
+                            <a:srgbClr val="2B2B2B"/>
+                          </a:solidFill>
+                          <a:latin typeface="Calibri"/>
+                        </a:rPr>
+                        <a:t>Diligénciala tú, y solo tú, </a:t>
+                      </a:r>
+                      <a:r>
+                        <a:rPr sz="1100" b="1" i="0">
+                          <a:solidFill>
+                            <a:srgbClr val="2B2B2B"/>
+                          </a:solidFill>
+                          <a:latin typeface="Calibri"/>
+                        </a:rPr>
+                        <a:t>con honestidad</a:t>
+                      </a:r>
+                      <a:r>
+                        <a:rPr sz="1100" b="0" i="0">
+                          <a:solidFill>
+                            <a:srgbClr val="2B2B2B"/>
+                          </a:solidFill>
+                          <a:latin typeface="Calibri"/>
+                        </a:rPr>
+                        <a:t> sobre tu participación real.</a:t>
+                      </a:r>
+                    </a:p>
+                  </a:txBody>
+                  <a:tcPr anchor="ctr" marL="109728" marR="91440" marT="36576" marB="36576">
+                    <a:solidFill>
+                      <a:srgbClr val="FFFFFF"/>
+                    </a:solidFill>
+                  </a:tcPr>
+                </a:tc>
+              </a:tr>
+              <a:tr h="477520">
+                <a:tc>
+                  <a:txBody>
+                    <a:bodyPr/>
+                    <a:lstStyle/>
+                    <a:p>
+                      <a:pPr algn="l"/>
+                      <a:r>
+                        <a:rPr sz="1100" b="1" i="0">
+                          <a:solidFill>
+                            <a:srgbClr val="2B2B2B"/>
+                          </a:solidFill>
+                          <a:latin typeface="Calibri"/>
+                        </a:rPr>
+                        <a:t>Sesión 07</a:t>
+                      </a:r>
+                      <a:r>
+                        <a:rPr sz="1100" b="0" i="0">
+                          <a:solidFill>
+                            <a:srgbClr val="2B2B2B"/>
+                          </a:solidFill>
+                          <a:latin typeface="Calibri"/>
+                        </a:rPr>
+                        <a:t> · pendiente</a:t>
+                      </a:r>
+                    </a:p>
+                  </a:txBody>
+                  <a:tcPr anchor="ctr" marL="109728" marR="91440" marT="36576" marB="36576">
+                    <a:solidFill>
+                      <a:srgbClr val="F2F2F2"/>
+                    </a:solidFill>
+                  </a:tcPr>
+                </a:tc>
+                <a:tc>
+                  <a:txBody>
+                    <a:bodyPr/>
+                    <a:lstStyle/>
+                    <a:p>
+                      <a:pPr algn="l"/>
+                      <a:r>
+                        <a:rPr sz="1100" b="1" i="0">
+                          <a:solidFill>
+                            <a:srgbClr val="2B2B2B"/>
+                          </a:solidFill>
+                          <a:latin typeface="Calibri"/>
+                        </a:rPr>
+                        <a:t>Coevaluación</a:t>
+                      </a:r>
+                      <a:r>
+                        <a:rPr sz="1100" b="0" i="0">
+                          <a:solidFill>
+                            <a:srgbClr val="2B2B2B"/>
+                          </a:solidFill>
+                          <a:latin typeface="Calibri"/>
+                        </a:rPr>
+                        <a:t> · Foro · 1,6%</a:t>
+                      </a:r>
+                    </a:p>
+                  </a:txBody>
+                  <a:tcPr anchor="ctr" marL="109728" marR="91440" marT="36576" marB="36576">
+                    <a:solidFill>
+                      <a:srgbClr val="F2F2F2"/>
+                    </a:solidFill>
+                  </a:tcPr>
+                </a:tc>
+                <a:tc>
+                  <a:txBody>
+                    <a:bodyPr/>
+                    <a:lstStyle/>
+                    <a:p>
+                      <a:pPr algn="l"/>
+                      <a:r>
+                        <a:rPr sz="1100" b="1" i="0">
+                          <a:solidFill>
+                            <a:srgbClr val="2B2B2B"/>
+                          </a:solidFill>
+                          <a:latin typeface="Calibri"/>
+                        </a:rPr>
+                        <a:t>Publica</a:t>
+                      </a:r>
+                      <a:r>
+                        <a:rPr sz="1100" b="0" i="0">
+                          <a:solidFill>
+                            <a:srgbClr val="2B2B2B"/>
+                          </a:solidFill>
+                          <a:latin typeface="Calibri"/>
+                        </a:rPr>
+                        <a:t> tu aporte: valora hechos del trabajo en equipo, no a las personas.</a:t>
+                      </a:r>
+                    </a:p>
+                  </a:txBody>
+                  <a:tcPr anchor="ctr" marL="109728" marR="91440" marT="36576" marB="36576">
+                    <a:solidFill>
+                      <a:srgbClr val="F2F2F2"/>
+                    </a:solidFill>
+                  </a:tcPr>
+                </a:tc>
+              </a:tr>
+            </a:tbl>
+          </a:graphicData>
+        </a:graphic>
+      </p:graphicFrame>
+      <p:sp>
+        <p:nvSpPr>
+          <p:cNvPr id="6" name="TextBox 5"/>
+          <p:cNvSpPr txBox="1"/>
+          <p:nvPr/>
+        </p:nvSpPr>
+        <p:spPr>
+          <a:xfrm>
+            <a:off x="640080" y="6080760"/>
+            <a:ext cx="10911535" cy="548640"/>
+          </a:xfrm>
+          <a:prstGeom prst="rect">
+            <a:avLst/>
+          </a:prstGeom>
+          <a:noFill/>
+        </p:spPr>
+        <p:txBody>
+          <a:bodyPr wrap="square" anchor="t" lIns="0" rIns="0" tIns="0" bIns="0">
+            <a:spAutoFit/>
+          </a:bodyPr>
+          <a:lstStyle/>
+          <a:p>
+            <a:r>
+              <a:rPr sz="1200" b="0" i="1">
+                <a:solidFill>
+                  <a:srgbClr val="2B2B2B"/>
+                </a:solidFill>
+                <a:latin typeface="Calibri"/>
+              </a:rPr>
+              <a:t>Esta misma tabla va al final de todas las sesiones. La </a:t>
+            </a:r>
+            <a:r>
+              <a:rPr sz="1200" b="1" i="1">
+                <a:solidFill>
+                  <a:srgbClr val="2B2B2B"/>
+                </a:solidFill>
+                <a:latin typeface="Calibri"/>
+              </a:rPr>
+              <a:t>fecha</a:t>
+            </a:r>
+            <a:r>
+              <a:rPr sz="1200" b="0" i="1">
+                <a:solidFill>
+                  <a:srgbClr val="2B2B2B"/>
+                </a:solidFill>
+                <a:latin typeface="Calibri"/>
+              </a:rPr>
+              <a:t> de cada ventana está en el enunciado del ítem (`Clases/Recursos/ACAs/`) y en el aula: si el aula y cualquier otro material se contradicen, </a:t>
+            </a:r>
+            <a:r>
+              <a:rPr sz="1200" b="1" i="1">
+                <a:solidFill>
+                  <a:srgbClr val="2B2B2B"/>
+                </a:solidFill>
+                <a:latin typeface="Calibri"/>
+              </a:rPr>
+              <a:t>manda el aula</a:t>
+            </a:r>
+            <a:r>
+              <a:rPr sz="1200" b="0" i="1">
+                <a:solidFill>
+                  <a:srgbClr val="2B2B2B"/>
+                </a:solidFill>
+                <a:latin typeface="Calibri"/>
+              </a:rPr>
+              <a:t>.</a:t>
+            </a:r>
+          </a:p>
+        </p:txBody>
+      </p:sp>
+      <p:sp>
+        <p:nvSpPr>
+          <p:cNvPr id="7" name="TextBox 6"/>
+          <p:cNvSpPr txBox="1"/>
+          <p:nvPr/>
+        </p:nvSpPr>
+        <p:spPr>
+          <a:xfrm>
+            <a:off x="11094415" y="6446520"/>
+            <a:ext cx="548640" cy="274320"/>
+          </a:xfrm>
+          <a:prstGeom prst="rect">
+            <a:avLst/>
+          </a:prstGeom>
+          <a:noFill/>
+        </p:spPr>
+        <p:txBody>
+          <a:bodyPr wrap="square" anchor="t" lIns="0" rIns="0" tIns="0" bIns="0">
+            <a:spAutoFit/>
+          </a:bodyPr>
+          <a:lstStyle/>
+          <a:p>
+            <a:pPr algn="r"/>
+            <a:r>
+              <a:rPr sz="1000" b="1" i="0">
+                <a:solidFill>
+                  <a:srgbClr val="8F989D"/>
+                </a:solidFill>
+                <a:latin typeface="Calibri"/>
+              </a:rPr>
+              <a:t>25</a:t>
+            </a:r>
+          </a:p>
+        </p:txBody>
+      </p:sp>
+    </p:spTree>
+  </p:cSld>
+  <p:clrMapOvr>
+    <a:masterClrMapping/>
+  </p:clrMapOvr>
+</p:sld>
+</file>
+
+<file path=ppt/slides/slide26.xml><?xml version="1.0" encoding="utf-8"?>
 <p:sld xmlns:a="http://schemas.openxmlformats.org/drawingml/2006/main" xmlns:p="http://schemas.openxmlformats.org/presentationml/2006/main" xmlns:r="http://schemas.openxmlformats.org/officeDocument/2006/relationships">
   <p:cSld>
     <p:bg>
